--- a/src/streamlit/Chap3/Présentation1.pptx
+++ b/src/streamlit/Chap3/Présentation1.pptx
@@ -109,6 +109,11 @@
       </a:defRPr>
     </a:lvl9pPr>
   </p:defaultTextStyle>
+  <p:extLst>
+    <p:ext uri="{EFAFB233-063F-42B5-8137-9DF3F51BA10A}">
+      <p15:sldGuideLst xmlns:p15="http://schemas.microsoft.com/office/powerpoint/2012/main"/>
+    </p:ext>
+  </p:extLst>
 </p:presentation>
 </file>
 
@@ -259,7 +264,7 @@
           <a:p>
             <a:fld id="{D137D0E0-26E3-4A3B-B762-973E15936663}" type="datetimeFigureOut">
               <a:rPr lang="fr-FR" smtClean="0"/>
-              <a:t>05/07/2025</a:t>
+              <a:t>22/07/2025</a:t>
             </a:fld>
             <a:endParaRPr lang="fr-FR"/>
           </a:p>
@@ -457,7 +462,7 @@
           <a:p>
             <a:fld id="{D137D0E0-26E3-4A3B-B762-973E15936663}" type="datetimeFigureOut">
               <a:rPr lang="fr-FR" smtClean="0"/>
-              <a:t>05/07/2025</a:t>
+              <a:t>22/07/2025</a:t>
             </a:fld>
             <a:endParaRPr lang="fr-FR"/>
           </a:p>
@@ -665,7 +670,7 @@
           <a:p>
             <a:fld id="{D137D0E0-26E3-4A3B-B762-973E15936663}" type="datetimeFigureOut">
               <a:rPr lang="fr-FR" smtClean="0"/>
-              <a:t>05/07/2025</a:t>
+              <a:t>22/07/2025</a:t>
             </a:fld>
             <a:endParaRPr lang="fr-FR"/>
           </a:p>
@@ -863,7 +868,7 @@
           <a:p>
             <a:fld id="{D137D0E0-26E3-4A3B-B762-973E15936663}" type="datetimeFigureOut">
               <a:rPr lang="fr-FR" smtClean="0"/>
-              <a:t>05/07/2025</a:t>
+              <a:t>22/07/2025</a:t>
             </a:fld>
             <a:endParaRPr lang="fr-FR"/>
           </a:p>
@@ -1138,7 +1143,7 @@
           <a:p>
             <a:fld id="{D137D0E0-26E3-4A3B-B762-973E15936663}" type="datetimeFigureOut">
               <a:rPr lang="fr-FR" smtClean="0"/>
-              <a:t>05/07/2025</a:t>
+              <a:t>22/07/2025</a:t>
             </a:fld>
             <a:endParaRPr lang="fr-FR"/>
           </a:p>
@@ -1403,7 +1408,7 @@
           <a:p>
             <a:fld id="{D137D0E0-26E3-4A3B-B762-973E15936663}" type="datetimeFigureOut">
               <a:rPr lang="fr-FR" smtClean="0"/>
-              <a:t>05/07/2025</a:t>
+              <a:t>22/07/2025</a:t>
             </a:fld>
             <a:endParaRPr lang="fr-FR"/>
           </a:p>
@@ -1815,7 +1820,7 @@
           <a:p>
             <a:fld id="{D137D0E0-26E3-4A3B-B762-973E15936663}" type="datetimeFigureOut">
               <a:rPr lang="fr-FR" smtClean="0"/>
-              <a:t>05/07/2025</a:t>
+              <a:t>22/07/2025</a:t>
             </a:fld>
             <a:endParaRPr lang="fr-FR"/>
           </a:p>
@@ -1956,7 +1961,7 @@
           <a:p>
             <a:fld id="{D137D0E0-26E3-4A3B-B762-973E15936663}" type="datetimeFigureOut">
               <a:rPr lang="fr-FR" smtClean="0"/>
-              <a:t>05/07/2025</a:t>
+              <a:t>22/07/2025</a:t>
             </a:fld>
             <a:endParaRPr lang="fr-FR"/>
           </a:p>
@@ -2069,7 +2074,7 @@
           <a:p>
             <a:fld id="{D137D0E0-26E3-4A3B-B762-973E15936663}" type="datetimeFigureOut">
               <a:rPr lang="fr-FR" smtClean="0"/>
-              <a:t>05/07/2025</a:t>
+              <a:t>22/07/2025</a:t>
             </a:fld>
             <a:endParaRPr lang="fr-FR"/>
           </a:p>
@@ -2380,7 +2385,7 @@
           <a:p>
             <a:fld id="{D137D0E0-26E3-4A3B-B762-973E15936663}" type="datetimeFigureOut">
               <a:rPr lang="fr-FR" smtClean="0"/>
-              <a:t>05/07/2025</a:t>
+              <a:t>22/07/2025</a:t>
             </a:fld>
             <a:endParaRPr lang="fr-FR"/>
           </a:p>
@@ -2668,7 +2673,7 @@
           <a:p>
             <a:fld id="{D137D0E0-26E3-4A3B-B762-973E15936663}" type="datetimeFigureOut">
               <a:rPr lang="fr-FR" smtClean="0"/>
-              <a:t>05/07/2025</a:t>
+              <a:t>22/07/2025</a:t>
             </a:fld>
             <a:endParaRPr lang="fr-FR"/>
           </a:p>
@@ -2909,7 +2914,7 @@
           <a:p>
             <a:fld id="{D137D0E0-26E3-4A3B-B762-973E15936663}" type="datetimeFigureOut">
               <a:rPr lang="fr-FR" smtClean="0"/>
-              <a:t>05/07/2025</a:t>
+              <a:t>22/07/2025</a:t>
             </a:fld>
             <a:endParaRPr lang="fr-FR"/>
           </a:p>
@@ -3444,8 +3449,8 @@
           </a:p>
         </p:txBody>
       </p:sp>
-      <mc:AlternateContent xmlns:mc="http://schemas.openxmlformats.org/markup-compatibility/2006">
-        <mc:Choice xmlns:a14="http://schemas.microsoft.com/office/drawing/2010/main" Requires="a14">
+      <mc:AlternateContent xmlns:mc="http://schemas.openxmlformats.org/markup-compatibility/2006" xmlns:a14="http://schemas.microsoft.com/office/drawing/2010/main">
+        <mc:Choice Requires="a14">
           <p:sp>
             <p:nvSpPr>
               <p:cNvPr id="12" name="Rectangle : coins arrondis 11">
@@ -3651,6 +3656,7 @@
                         <a:solidFill>
                           <a:schemeClr val="tx1"/>
                         </a:solidFill>
+                        <a:latin typeface="Cambria Math" panose="02040503050406030204" pitchFamily="18" charset="0"/>
                       </a:rPr>
                       <m:t>𝑺𝑨𝑹𝑰𝑴𝑨</m:t>
                     </m:r>
@@ -3661,6 +3667,7 @@
                             <a:solidFill>
                               <a:schemeClr val="tx1"/>
                             </a:solidFill>
+                            <a:latin typeface="Cambria Math" panose="02040503050406030204" pitchFamily="18" charset="0"/>
                           </a:rPr>
                         </m:ctrlPr>
                       </m:dPr>
@@ -3670,6 +3677,7 @@
                             <a:solidFill>
                               <a:schemeClr val="tx1"/>
                             </a:solidFill>
+                            <a:latin typeface="Cambria Math" panose="02040503050406030204" pitchFamily="18" charset="0"/>
                           </a:rPr>
                           <m:t>𝒑</m:t>
                         </m:r>
@@ -3678,6 +3686,7 @@
                             <a:solidFill>
                               <a:schemeClr val="tx1"/>
                             </a:solidFill>
+                            <a:latin typeface="Cambria Math" panose="02040503050406030204" pitchFamily="18" charset="0"/>
                           </a:rPr>
                           <m:t>, </m:t>
                         </m:r>
@@ -3686,6 +3695,7 @@
                             <a:solidFill>
                               <a:schemeClr val="tx1"/>
                             </a:solidFill>
+                            <a:latin typeface="Cambria Math" panose="02040503050406030204" pitchFamily="18" charset="0"/>
                           </a:rPr>
                           <m:t>𝒅</m:t>
                         </m:r>
@@ -3694,6 +3704,7 @@
                             <a:solidFill>
                               <a:schemeClr val="tx1"/>
                             </a:solidFill>
+                            <a:latin typeface="Cambria Math" panose="02040503050406030204" pitchFamily="18" charset="0"/>
                           </a:rPr>
                           <m:t>, </m:t>
                         </m:r>
@@ -3702,6 +3713,7 @@
                             <a:solidFill>
                               <a:schemeClr val="tx1"/>
                             </a:solidFill>
+                            <a:latin typeface="Cambria Math" panose="02040503050406030204" pitchFamily="18" charset="0"/>
                           </a:rPr>
                           <m:t>𝒒</m:t>
                         </m:r>
@@ -3714,6 +3726,7 @@
                             <a:solidFill>
                               <a:schemeClr val="tx1"/>
                             </a:solidFill>
+                            <a:latin typeface="Cambria Math" panose="02040503050406030204" pitchFamily="18" charset="0"/>
                           </a:rPr>
                         </m:ctrlPr>
                       </m:sSubPr>
@@ -3725,6 +3738,7 @@
                                 <a:solidFill>
                                   <a:schemeClr val="tx1"/>
                                 </a:solidFill>
+                                <a:latin typeface="Cambria Math" panose="02040503050406030204" pitchFamily="18" charset="0"/>
                               </a:rPr>
                             </m:ctrlPr>
                           </m:dPr>
@@ -3734,6 +3748,7 @@
                                 <a:solidFill>
                                   <a:schemeClr val="tx1"/>
                                 </a:solidFill>
+                                <a:latin typeface="Cambria Math" panose="02040503050406030204" pitchFamily="18" charset="0"/>
                               </a:rPr>
                               <m:t>𝑷</m:t>
                             </m:r>
@@ -3742,6 +3757,7 @@
                                 <a:solidFill>
                                   <a:schemeClr val="tx1"/>
                                 </a:solidFill>
+                                <a:latin typeface="Cambria Math" panose="02040503050406030204" pitchFamily="18" charset="0"/>
                               </a:rPr>
                               <m:t>, </m:t>
                             </m:r>
@@ -3750,6 +3766,7 @@
                                 <a:solidFill>
                                   <a:schemeClr val="tx1"/>
                                 </a:solidFill>
+                                <a:latin typeface="Cambria Math" panose="02040503050406030204" pitchFamily="18" charset="0"/>
                               </a:rPr>
                               <m:t>𝑫</m:t>
                             </m:r>
@@ -3758,6 +3775,7 @@
                                 <a:solidFill>
                                   <a:schemeClr val="tx1"/>
                                 </a:solidFill>
+                                <a:latin typeface="Cambria Math" panose="02040503050406030204" pitchFamily="18" charset="0"/>
                               </a:rPr>
                               <m:t>, </m:t>
                             </m:r>
@@ -3766,6 +3784,7 @@
                                 <a:solidFill>
                                   <a:schemeClr val="tx1"/>
                                 </a:solidFill>
+                                <a:latin typeface="Cambria Math" panose="02040503050406030204" pitchFamily="18" charset="0"/>
                               </a:rPr>
                               <m:t>𝑸</m:t>
                             </m:r>
@@ -3795,7 +3814,7 @@
             </p:txBody>
           </p:sp>
         </mc:Choice>
-        <mc:Fallback>
+        <mc:Fallback xmlns="">
           <p:sp>
             <p:nvSpPr>
               <p:cNvPr id="12" name="Rectangle : coins arrondis 11">
@@ -5930,8 +5949,8 @@
           </a:p>
         </p:txBody>
       </p:sp>
-      <mc:AlternateContent xmlns:mc="http://schemas.openxmlformats.org/markup-compatibility/2006">
-        <mc:Choice xmlns:a14="http://schemas.microsoft.com/office/drawing/2010/main" Requires="a14">
+      <mc:AlternateContent xmlns:mc="http://schemas.openxmlformats.org/markup-compatibility/2006" xmlns:a14="http://schemas.microsoft.com/office/drawing/2010/main">
+        <mc:Choice Requires="a14">
           <p:graphicFrame>
             <p:nvGraphicFramePr>
               <p:cNvPr id="23" name="Tableau 22">
@@ -6019,6 +6038,7 @@
                         <a:bodyPr/>
                         <a:lstStyle/>
                         <a:p>
+                          <a:pPr/>
                           <a14:m>
                             <m:oMathPara xmlns:m="http://schemas.openxmlformats.org/officeDocument/2006/math">
                               <m:oMathParaPr>
@@ -6032,7 +6052,7 @@
                                         <a:solidFill>
                                           <a:schemeClr val="tx1"/>
                                         </a:solidFill>
-                                        <a:latin typeface="+mn-lt"/>
+                                        <a:latin typeface="Cambria Math" panose="02040503050406030204" pitchFamily="18" charset="0"/>
                                       </a:rPr>
                                     </m:ctrlPr>
                                   </m:sSubPr>
@@ -6042,7 +6062,7 @@
                                         <a:solidFill>
                                           <a:schemeClr val="tx1"/>
                                         </a:solidFill>
-                                        <a:latin typeface="+mn-lt"/>
+                                        <a:latin typeface="Cambria Math" panose="02040503050406030204" pitchFamily="18" charset="0"/>
                                       </a:rPr>
                                       <m:t>𝑿</m:t>
                                     </m:r>
@@ -6053,7 +6073,7 @@
                                         <a:solidFill>
                                           <a:schemeClr val="tx1"/>
                                         </a:solidFill>
-                                        <a:latin typeface="+mn-lt"/>
+                                        <a:latin typeface="Cambria Math" panose="02040503050406030204" pitchFamily="18" charset="0"/>
                                       </a:rPr>
                                       <m:t>𝑵</m:t>
                                     </m:r>
@@ -6062,7 +6082,7 @@
                                         <a:solidFill>
                                           <a:schemeClr val="tx1"/>
                                         </a:solidFill>
-                                        <a:latin typeface="+mn-lt"/>
+                                        <a:latin typeface="Cambria Math" panose="02040503050406030204" pitchFamily="18" charset="0"/>
                                       </a:rPr>
                                       <m:t>−</m:t>
                                     </m:r>
@@ -6071,7 +6091,7 @@
                                         <a:solidFill>
                                           <a:schemeClr val="tx1"/>
                                         </a:solidFill>
-                                        <a:latin typeface="+mn-lt"/>
+                                        <a:latin typeface="Cambria Math" panose="02040503050406030204" pitchFamily="18" charset="0"/>
                                       </a:rPr>
                                       <m:t>𝑳</m:t>
                                     </m:r>
@@ -6141,6 +6161,7 @@
                         <a:bodyPr/>
                         <a:lstStyle/>
                         <a:p>
+                          <a:pPr/>
                           <a14:m>
                             <m:oMathPara xmlns:m="http://schemas.openxmlformats.org/officeDocument/2006/math">
                               <m:oMathParaPr>
@@ -6154,7 +6175,7 @@
                                         <a:solidFill>
                                           <a:schemeClr val="tx1"/>
                                         </a:solidFill>
-                                        <a:latin typeface="+mn-lt"/>
+                                        <a:latin typeface="Cambria Math" panose="02040503050406030204" pitchFamily="18" charset="0"/>
                                       </a:rPr>
                                     </m:ctrlPr>
                                   </m:sSubPr>
@@ -6164,7 +6185,7 @@
                                         <a:solidFill>
                                           <a:schemeClr val="tx1"/>
                                         </a:solidFill>
-                                        <a:latin typeface="+mn-lt"/>
+                                        <a:latin typeface="Cambria Math" panose="02040503050406030204" pitchFamily="18" charset="0"/>
                                       </a:rPr>
                                       <m:t>𝑿</m:t>
                                     </m:r>
@@ -6175,7 +6196,7 @@
                                         <a:solidFill>
                                           <a:schemeClr val="tx1"/>
                                         </a:solidFill>
-                                        <a:latin typeface="+mn-lt"/>
+                                        <a:latin typeface="Cambria Math" panose="02040503050406030204" pitchFamily="18" charset="0"/>
                                       </a:rPr>
                                       <m:t>𝟑</m:t>
                                     </m:r>
@@ -6474,6 +6495,7 @@
                         <a:bodyPr/>
                         <a:lstStyle/>
                         <a:p>
+                          <a:pPr/>
                           <a14:m>
                             <m:oMathPara xmlns:m="http://schemas.openxmlformats.org/officeDocument/2006/math">
                               <m:oMathParaPr>
@@ -6487,7 +6509,7 @@
                                         <a:solidFill>
                                           <a:schemeClr val="tx1"/>
                                         </a:solidFill>
-                                        <a:latin typeface="+mn-lt"/>
+                                        <a:latin typeface="Cambria Math" panose="02040503050406030204" pitchFamily="18" charset="0"/>
                                       </a:rPr>
                                     </m:ctrlPr>
                                   </m:sSubPr>
@@ -6497,7 +6519,7 @@
                                         <a:solidFill>
                                           <a:schemeClr val="tx1"/>
                                         </a:solidFill>
-                                        <a:latin typeface="+mn-lt"/>
+                                        <a:latin typeface="Cambria Math" panose="02040503050406030204" pitchFamily="18" charset="0"/>
                                       </a:rPr>
                                       <m:t>𝑿</m:t>
                                     </m:r>
@@ -6508,7 +6530,7 @@
                                         <a:solidFill>
                                           <a:schemeClr val="tx1"/>
                                         </a:solidFill>
-                                        <a:latin typeface="+mn-lt"/>
+                                        <a:latin typeface="Cambria Math" panose="02040503050406030204" pitchFamily="18" charset="0"/>
                                       </a:rPr>
                                       <m:t>𝑵</m:t>
                                     </m:r>
@@ -6517,7 +6539,7 @@
                                         <a:solidFill>
                                           <a:schemeClr val="tx1"/>
                                         </a:solidFill>
-                                        <a:latin typeface="+mn-lt"/>
+                                        <a:latin typeface="Cambria Math" panose="02040503050406030204" pitchFamily="18" charset="0"/>
                                       </a:rPr>
                                       <m:t>−</m:t>
                                     </m:r>
@@ -6526,7 +6548,7 @@
                                         <a:solidFill>
                                           <a:schemeClr val="tx1"/>
                                         </a:solidFill>
-                                        <a:latin typeface="+mn-lt"/>
+                                        <a:latin typeface="Cambria Math" panose="02040503050406030204" pitchFamily="18" charset="0"/>
                                       </a:rPr>
                                       <m:t>𝟏</m:t>
                                     </m:r>
@@ -6599,7 +6621,7 @@
             </a:graphic>
           </p:graphicFrame>
         </mc:Choice>
-        <mc:Fallback>
+        <mc:Fallback xmlns="">
           <p:graphicFrame>
             <p:nvGraphicFramePr>
               <p:cNvPr id="23" name="Tableau 22">
@@ -7109,8 +7131,8 @@
           </p:graphicFrame>
         </mc:Fallback>
       </mc:AlternateContent>
-      <mc:AlternateContent xmlns:mc="http://schemas.openxmlformats.org/markup-compatibility/2006">
-        <mc:Choice xmlns:a14="http://schemas.microsoft.com/office/drawing/2010/main" Requires="a14">
+      <mc:AlternateContent xmlns:mc="http://schemas.openxmlformats.org/markup-compatibility/2006" xmlns:a14="http://schemas.microsoft.com/office/drawing/2010/main">
+        <mc:Choice Requires="a14">
           <p:graphicFrame>
             <p:nvGraphicFramePr>
               <p:cNvPr id="24" name="Tableau 23">
@@ -7198,6 +7220,7 @@
                         <a:bodyPr/>
                         <a:lstStyle/>
                         <a:p>
+                          <a:pPr/>
                           <a14:m>
                             <m:oMathPara xmlns:m="http://schemas.openxmlformats.org/officeDocument/2006/math">
                               <m:oMathParaPr>
@@ -7211,7 +7234,7 @@
                                         <a:solidFill>
                                           <a:schemeClr val="tx1"/>
                                         </a:solidFill>
-                                        <a:latin typeface="+mn-lt"/>
+                                        <a:latin typeface="Cambria Math" panose="02040503050406030204" pitchFamily="18" charset="0"/>
                                         <a:ea typeface="+mn-ea"/>
                                         <a:cs typeface="+mn-cs"/>
                                       </a:rPr>
@@ -7223,7 +7246,7 @@
                                         <a:solidFill>
                                           <a:schemeClr val="tx1"/>
                                         </a:solidFill>
-                                        <a:latin typeface="+mn-lt"/>
+                                        <a:latin typeface="Cambria Math" panose="02040503050406030204" pitchFamily="18" charset="0"/>
                                         <a:ea typeface="+mn-ea"/>
                                         <a:cs typeface="+mn-cs"/>
                                       </a:rPr>
@@ -7236,7 +7259,7 @@
                                         <a:solidFill>
                                           <a:schemeClr val="tx1"/>
                                         </a:solidFill>
-                                        <a:latin typeface="+mn-lt"/>
+                                        <a:latin typeface="Cambria Math" panose="02040503050406030204" pitchFamily="18" charset="0"/>
                                         <a:ea typeface="+mn-ea"/>
                                         <a:cs typeface="+mn-cs"/>
                                       </a:rPr>
@@ -7310,6 +7333,7 @@
                         <a:bodyPr/>
                         <a:lstStyle/>
                         <a:p>
+                          <a:pPr/>
                           <a14:m>
                             <m:oMathPara xmlns:m="http://schemas.openxmlformats.org/officeDocument/2006/math">
                               <m:oMathParaPr>
@@ -7323,7 +7347,7 @@
                                         <a:solidFill>
                                           <a:schemeClr val="tx1"/>
                                         </a:solidFill>
-                                        <a:latin typeface="+mn-lt"/>
+                                        <a:latin typeface="Cambria Math" panose="02040503050406030204" pitchFamily="18" charset="0"/>
                                       </a:rPr>
                                     </m:ctrlPr>
                                   </m:sSubPr>
@@ -7333,7 +7357,7 @@
                                         <a:solidFill>
                                           <a:schemeClr val="tx1"/>
                                         </a:solidFill>
-                                        <a:latin typeface="+mn-lt"/>
+                                        <a:latin typeface="Cambria Math" panose="02040503050406030204" pitchFamily="18" charset="0"/>
                                       </a:rPr>
                                       <m:t>𝒀</m:t>
                                     </m:r>
@@ -7344,7 +7368,7 @@
                                         <a:solidFill>
                                           <a:schemeClr val="tx1"/>
                                         </a:solidFill>
-                                        <a:latin typeface="+mn-lt"/>
+                                        <a:latin typeface="Cambria Math" panose="02040503050406030204" pitchFamily="18" charset="0"/>
                                       </a:rPr>
                                       <m:t>𝟑</m:t>
                                     </m:r>
@@ -7643,6 +7667,7 @@
                         <a:bodyPr/>
                         <a:lstStyle/>
                         <a:p>
+                          <a:pPr/>
                           <a14:m>
                             <m:oMathPara xmlns:m="http://schemas.openxmlformats.org/officeDocument/2006/math">
                               <m:oMathParaPr>
@@ -7656,7 +7681,7 @@
                                         <a:solidFill>
                                           <a:schemeClr val="tx1"/>
                                         </a:solidFill>
-                                        <a:latin typeface="+mn-lt"/>
+                                        <a:latin typeface="Cambria Math" panose="02040503050406030204" pitchFamily="18" charset="0"/>
                                       </a:rPr>
                                     </m:ctrlPr>
                                   </m:sSubPr>
@@ -7666,7 +7691,7 @@
                                         <a:solidFill>
                                           <a:schemeClr val="tx1"/>
                                         </a:solidFill>
-                                        <a:latin typeface="+mn-lt"/>
+                                        <a:latin typeface="Cambria Math" panose="02040503050406030204" pitchFamily="18" charset="0"/>
                                       </a:rPr>
                                       <m:t>𝒀</m:t>
                                     </m:r>
@@ -7677,7 +7702,7 @@
                                         <a:solidFill>
                                           <a:schemeClr val="tx1"/>
                                         </a:solidFill>
-                                        <a:latin typeface="+mn-lt"/>
+                                        <a:latin typeface="Cambria Math" panose="02040503050406030204" pitchFamily="18" charset="0"/>
                                       </a:rPr>
                                       <m:t>𝑵</m:t>
                                     </m:r>
@@ -7686,7 +7711,7 @@
                                         <a:solidFill>
                                           <a:schemeClr val="tx1"/>
                                         </a:solidFill>
-                                        <a:latin typeface="+mn-lt"/>
+                                        <a:latin typeface="Cambria Math" panose="02040503050406030204" pitchFamily="18" charset="0"/>
                                       </a:rPr>
                                       <m:t>−</m:t>
                                     </m:r>
@@ -7695,7 +7720,7 @@
                                         <a:solidFill>
                                           <a:schemeClr val="tx1"/>
                                         </a:solidFill>
-                                        <a:latin typeface="+mn-lt"/>
+                                        <a:latin typeface="Cambria Math" panose="02040503050406030204" pitchFamily="18" charset="0"/>
                                       </a:rPr>
                                       <m:t>𝟏</m:t>
                                     </m:r>
@@ -7768,7 +7793,7 @@
             </a:graphic>
           </p:graphicFrame>
         </mc:Choice>
-        <mc:Fallback>
+        <mc:Fallback xmlns="">
           <p:graphicFrame>
             <p:nvGraphicFramePr>
               <p:cNvPr id="24" name="Tableau 23">
@@ -8380,8 +8405,8 @@
           </a:p>
         </p:txBody>
       </p:sp>
-      <mc:AlternateContent xmlns:mc="http://schemas.openxmlformats.org/markup-compatibility/2006">
-        <mc:Choice xmlns:a14="http://schemas.microsoft.com/office/drawing/2010/main" Requires="a14">
+      <mc:AlternateContent xmlns:mc="http://schemas.openxmlformats.org/markup-compatibility/2006" xmlns:a14="http://schemas.microsoft.com/office/drawing/2010/main">
+        <mc:Choice Requires="a14">
           <p:graphicFrame>
             <p:nvGraphicFramePr>
               <p:cNvPr id="5" name="Tableau 4">
@@ -8469,6 +8494,7 @@
                         <a:bodyPr/>
                         <a:lstStyle/>
                         <a:p>
+                          <a:pPr/>
                           <a14:m>
                             <m:oMathPara xmlns:m="http://schemas.openxmlformats.org/officeDocument/2006/math">
                               <m:oMathParaPr>
@@ -8482,7 +8508,7 @@
                                         <a:solidFill>
                                           <a:schemeClr val="tx1"/>
                                         </a:solidFill>
-                                        <a:latin typeface="+mn-lt"/>
+                                        <a:latin typeface="Cambria Math" panose="02040503050406030204" pitchFamily="18" charset="0"/>
                                       </a:rPr>
                                     </m:ctrlPr>
                                   </m:sSubPr>
@@ -8492,7 +8518,7 @@
                                         <a:solidFill>
                                           <a:schemeClr val="tx1"/>
                                         </a:solidFill>
-                                        <a:latin typeface="+mn-lt"/>
+                                        <a:latin typeface="Cambria Math" panose="02040503050406030204" pitchFamily="18" charset="0"/>
                                       </a:rPr>
                                       <m:t>𝑿</m:t>
                                     </m:r>
@@ -8503,7 +8529,7 @@
                                         <a:solidFill>
                                           <a:schemeClr val="tx1"/>
                                         </a:solidFill>
-                                        <a:latin typeface="+mn-lt"/>
+                                        <a:latin typeface="Cambria Math" panose="02040503050406030204" pitchFamily="18" charset="0"/>
                                       </a:rPr>
                                       <m:t>𝟏</m:t>
                                     </m:r>
@@ -8573,6 +8599,7 @@
                         <a:bodyPr/>
                         <a:lstStyle/>
                         <a:p>
+                          <a:pPr/>
                           <a14:m>
                             <m:oMathPara xmlns:m="http://schemas.openxmlformats.org/officeDocument/2006/math">
                               <m:oMathParaPr>
@@ -8586,7 +8613,7 @@
                                         <a:solidFill>
                                           <a:schemeClr val="tx1"/>
                                         </a:solidFill>
-                                        <a:latin typeface="+mn-lt"/>
+                                        <a:latin typeface="Cambria Math" panose="02040503050406030204" pitchFamily="18" charset="0"/>
                                       </a:rPr>
                                     </m:ctrlPr>
                                   </m:sSubPr>
@@ -8596,7 +8623,7 @@
                                         <a:solidFill>
                                           <a:schemeClr val="tx1"/>
                                         </a:solidFill>
-                                        <a:latin typeface="+mn-lt"/>
+                                        <a:latin typeface="Cambria Math" panose="02040503050406030204" pitchFamily="18" charset="0"/>
                                       </a:rPr>
                                       <m:t>𝑿</m:t>
                                     </m:r>
@@ -8607,7 +8634,7 @@
                                         <a:solidFill>
                                           <a:schemeClr val="tx1"/>
                                         </a:solidFill>
-                                        <a:latin typeface="+mn-lt"/>
+                                        <a:latin typeface="Cambria Math" panose="02040503050406030204" pitchFamily="18" charset="0"/>
                                       </a:rPr>
                                       <m:t>𝟐</m:t>
                                     </m:r>
@@ -8906,6 +8933,7 @@
                         <a:bodyPr/>
                         <a:lstStyle/>
                         <a:p>
+                          <a:pPr/>
                           <a14:m>
                             <m:oMathPara xmlns:m="http://schemas.openxmlformats.org/officeDocument/2006/math">
                               <m:oMathParaPr>
@@ -8919,7 +8947,7 @@
                                         <a:solidFill>
                                           <a:schemeClr val="tx1"/>
                                         </a:solidFill>
-                                        <a:latin typeface="+mn-lt"/>
+                                        <a:latin typeface="Cambria Math" panose="02040503050406030204" pitchFamily="18" charset="0"/>
                                       </a:rPr>
                                     </m:ctrlPr>
                                   </m:sSubPr>
@@ -8929,7 +8957,7 @@
                                         <a:solidFill>
                                           <a:schemeClr val="tx1"/>
                                         </a:solidFill>
-                                        <a:latin typeface="+mn-lt"/>
+                                        <a:latin typeface="Cambria Math" panose="02040503050406030204" pitchFamily="18" charset="0"/>
                                       </a:rPr>
                                       <m:t>𝑿</m:t>
                                     </m:r>
@@ -8940,7 +8968,7 @@
                                         <a:solidFill>
                                           <a:schemeClr val="tx1"/>
                                         </a:solidFill>
-                                        <a:latin typeface="+mn-lt"/>
+                                        <a:latin typeface="Cambria Math" panose="02040503050406030204" pitchFamily="18" charset="0"/>
                                       </a:rPr>
                                       <m:t>𝑳</m:t>
                                     </m:r>
@@ -9013,7 +9041,7 @@
             </a:graphic>
           </p:graphicFrame>
         </mc:Choice>
-        <mc:Fallback>
+        <mc:Fallback xmlns="">
           <p:graphicFrame>
             <p:nvGraphicFramePr>
               <p:cNvPr id="5" name="Tableau 4">
@@ -9523,8 +9551,8 @@
           </p:graphicFrame>
         </mc:Fallback>
       </mc:AlternateContent>
-      <mc:AlternateContent xmlns:mc="http://schemas.openxmlformats.org/markup-compatibility/2006">
-        <mc:Choice xmlns:a14="http://schemas.microsoft.com/office/drawing/2010/main" Requires="a14">
+      <mc:AlternateContent xmlns:mc="http://schemas.openxmlformats.org/markup-compatibility/2006" xmlns:a14="http://schemas.microsoft.com/office/drawing/2010/main">
+        <mc:Choice Requires="a14">
           <p:graphicFrame>
             <p:nvGraphicFramePr>
               <p:cNvPr id="8" name="Tableau 7">
@@ -9612,6 +9640,7 @@
                         <a:bodyPr/>
                         <a:lstStyle/>
                         <a:p>
+                          <a:pPr/>
                           <a14:m>
                             <m:oMathPara xmlns:m="http://schemas.openxmlformats.org/officeDocument/2006/math">
                               <m:oMathParaPr>
@@ -9625,7 +9654,7 @@
                                         <a:solidFill>
                                           <a:schemeClr val="tx1"/>
                                         </a:solidFill>
-                                        <a:latin typeface="+mn-lt"/>
+                                        <a:latin typeface="Cambria Math" panose="02040503050406030204" pitchFamily="18" charset="0"/>
                                       </a:rPr>
                                     </m:ctrlPr>
                                   </m:sSubPr>
@@ -9635,7 +9664,7 @@
                                         <a:solidFill>
                                           <a:schemeClr val="tx1"/>
                                         </a:solidFill>
-                                        <a:latin typeface="+mn-lt"/>
+                                        <a:latin typeface="Cambria Math" panose="02040503050406030204" pitchFamily="18" charset="0"/>
                                       </a:rPr>
                                       <m:t>𝒀</m:t>
                                     </m:r>
@@ -9646,7 +9675,7 @@
                                         <a:solidFill>
                                           <a:schemeClr val="tx1"/>
                                         </a:solidFill>
-                                        <a:latin typeface="+mn-lt"/>
+                                        <a:latin typeface="Cambria Math" panose="02040503050406030204" pitchFamily="18" charset="0"/>
                                       </a:rPr>
                                       <m:t>𝟏</m:t>
                                     </m:r>
@@ -9716,6 +9745,7 @@
                         <a:bodyPr/>
                         <a:lstStyle/>
                         <a:p>
+                          <a:pPr/>
                           <a14:m>
                             <m:oMathPara xmlns:m="http://schemas.openxmlformats.org/officeDocument/2006/math">
                               <m:oMathParaPr>
@@ -9729,7 +9759,7 @@
                                         <a:solidFill>
                                           <a:schemeClr val="tx1"/>
                                         </a:solidFill>
-                                        <a:latin typeface="+mn-lt"/>
+                                        <a:latin typeface="Cambria Math" panose="02040503050406030204" pitchFamily="18" charset="0"/>
                                       </a:rPr>
                                     </m:ctrlPr>
                                   </m:sSubPr>
@@ -9739,7 +9769,7 @@
                                         <a:solidFill>
                                           <a:schemeClr val="tx1"/>
                                         </a:solidFill>
-                                        <a:latin typeface="+mn-lt"/>
+                                        <a:latin typeface="Cambria Math" panose="02040503050406030204" pitchFamily="18" charset="0"/>
                                       </a:rPr>
                                       <m:t>𝒀</m:t>
                                     </m:r>
@@ -9750,7 +9780,7 @@
                                         <a:solidFill>
                                           <a:schemeClr val="tx1"/>
                                         </a:solidFill>
-                                        <a:latin typeface="+mn-lt"/>
+                                        <a:latin typeface="Cambria Math" panose="02040503050406030204" pitchFamily="18" charset="0"/>
                                       </a:rPr>
                                       <m:t>𝟐</m:t>
                                     </m:r>
@@ -10049,6 +10079,7 @@
                         <a:bodyPr/>
                         <a:lstStyle/>
                         <a:p>
+                          <a:pPr/>
                           <a14:m>
                             <m:oMathPara xmlns:m="http://schemas.openxmlformats.org/officeDocument/2006/math">
                               <m:oMathParaPr>
@@ -10062,7 +10093,7 @@
                                         <a:solidFill>
                                           <a:schemeClr val="tx1"/>
                                         </a:solidFill>
-                                        <a:latin typeface="+mn-lt"/>
+                                        <a:latin typeface="Cambria Math" panose="02040503050406030204" pitchFamily="18" charset="0"/>
                                       </a:rPr>
                                     </m:ctrlPr>
                                   </m:sSubPr>
@@ -10072,7 +10103,7 @@
                                         <a:solidFill>
                                           <a:schemeClr val="tx1"/>
                                         </a:solidFill>
-                                        <a:latin typeface="+mn-lt"/>
+                                        <a:latin typeface="Cambria Math" panose="02040503050406030204" pitchFamily="18" charset="0"/>
                                       </a:rPr>
                                       <m:t>𝒀</m:t>
                                     </m:r>
@@ -10083,7 +10114,7 @@
                                         <a:solidFill>
                                           <a:schemeClr val="tx1"/>
                                         </a:solidFill>
-                                        <a:latin typeface="+mn-lt"/>
+                                        <a:latin typeface="Cambria Math" panose="02040503050406030204" pitchFamily="18" charset="0"/>
                                       </a:rPr>
                                       <m:t>𝑳</m:t>
                                     </m:r>
@@ -10156,7 +10187,7 @@
             </a:graphic>
           </p:graphicFrame>
         </mc:Choice>
-        <mc:Fallback>
+        <mc:Fallback xmlns="">
           <p:graphicFrame>
             <p:nvGraphicFramePr>
               <p:cNvPr id="8" name="Tableau 7">
@@ -10666,8 +10697,8 @@
           </p:graphicFrame>
         </mc:Fallback>
       </mc:AlternateContent>
-      <mc:AlternateContent xmlns:mc="http://schemas.openxmlformats.org/markup-compatibility/2006">
-        <mc:Choice xmlns:a14="http://schemas.microsoft.com/office/drawing/2010/main" Requires="a14">
+      <mc:AlternateContent xmlns:mc="http://schemas.openxmlformats.org/markup-compatibility/2006" xmlns:a14="http://schemas.microsoft.com/office/drawing/2010/main">
+        <mc:Choice Requires="a14">
           <p:graphicFrame>
             <p:nvGraphicFramePr>
               <p:cNvPr id="17" name="Tableau 16">
@@ -10755,6 +10786,7 @@
                         <a:bodyPr/>
                         <a:lstStyle/>
                         <a:p>
+                          <a:pPr/>
                           <a14:m>
                             <m:oMathPara xmlns:m="http://schemas.openxmlformats.org/officeDocument/2006/math">
                               <m:oMathParaPr>
@@ -10768,7 +10800,7 @@
                                         <a:solidFill>
                                           <a:schemeClr val="tx1"/>
                                         </a:solidFill>
-                                        <a:latin typeface="+mn-lt"/>
+                                        <a:latin typeface="Cambria Math" panose="02040503050406030204" pitchFamily="18" charset="0"/>
                                       </a:rPr>
                                     </m:ctrlPr>
                                   </m:sSubPr>
@@ -10778,7 +10810,7 @@
                                         <a:solidFill>
                                           <a:schemeClr val="tx1"/>
                                         </a:solidFill>
-                                        <a:latin typeface="+mn-lt"/>
+                                        <a:latin typeface="Cambria Math" panose="02040503050406030204" pitchFamily="18" charset="0"/>
                                       </a:rPr>
                                       <m:t>𝒀</m:t>
                                     </m:r>
@@ -10789,7 +10821,7 @@
                                         <a:solidFill>
                                           <a:schemeClr val="tx1"/>
                                         </a:solidFill>
-                                        <a:latin typeface="+mn-lt"/>
+                                        <a:latin typeface="Cambria Math" panose="02040503050406030204" pitchFamily="18" charset="0"/>
                                       </a:rPr>
                                       <m:t>𝟐</m:t>
                                     </m:r>
@@ -10859,6 +10891,7 @@
                         <a:bodyPr/>
                         <a:lstStyle/>
                         <a:p>
+                          <a:pPr/>
                           <a14:m>
                             <m:oMathPara xmlns:m="http://schemas.openxmlformats.org/officeDocument/2006/math">
                               <m:oMathParaPr>
@@ -10872,7 +10905,7 @@
                                         <a:solidFill>
                                           <a:schemeClr val="tx1"/>
                                         </a:solidFill>
-                                        <a:latin typeface="+mn-lt"/>
+                                        <a:latin typeface="Cambria Math" panose="02040503050406030204" pitchFamily="18" charset="0"/>
                                       </a:rPr>
                                     </m:ctrlPr>
                                   </m:sSubPr>
@@ -10882,7 +10915,7 @@
                                         <a:solidFill>
                                           <a:schemeClr val="tx1"/>
                                         </a:solidFill>
-                                        <a:latin typeface="+mn-lt"/>
+                                        <a:latin typeface="Cambria Math" panose="02040503050406030204" pitchFamily="18" charset="0"/>
                                       </a:rPr>
                                       <m:t>𝒀</m:t>
                                     </m:r>
@@ -10893,7 +10926,7 @@
                                         <a:solidFill>
                                           <a:schemeClr val="tx1"/>
                                         </a:solidFill>
-                                        <a:latin typeface="+mn-lt"/>
+                                        <a:latin typeface="Cambria Math" panose="02040503050406030204" pitchFamily="18" charset="0"/>
                                       </a:rPr>
                                       <m:t>𝟑</m:t>
                                     </m:r>
@@ -11192,6 +11225,7 @@
                         <a:bodyPr/>
                         <a:lstStyle/>
                         <a:p>
+                          <a:pPr/>
                           <a14:m>
                             <m:oMathPara xmlns:m="http://schemas.openxmlformats.org/officeDocument/2006/math">
                               <m:oMathParaPr>
@@ -11205,7 +11239,7 @@
                                         <a:solidFill>
                                           <a:schemeClr val="tx1"/>
                                         </a:solidFill>
-                                        <a:latin typeface="+mn-lt"/>
+                                        <a:latin typeface="Cambria Math" panose="02040503050406030204" pitchFamily="18" charset="0"/>
                                       </a:rPr>
                                     </m:ctrlPr>
                                   </m:sSubPr>
@@ -11215,7 +11249,7 @@
                                         <a:solidFill>
                                           <a:schemeClr val="tx1"/>
                                         </a:solidFill>
-                                        <a:latin typeface="+mn-lt"/>
+                                        <a:latin typeface="Cambria Math" panose="02040503050406030204" pitchFamily="18" charset="0"/>
                                       </a:rPr>
                                       <m:t>𝒀</m:t>
                                     </m:r>
@@ -11226,7 +11260,7 @@
                                         <a:solidFill>
                                           <a:schemeClr val="tx1"/>
                                         </a:solidFill>
-                                        <a:latin typeface="+mn-lt"/>
+                                        <a:latin typeface="Cambria Math" panose="02040503050406030204" pitchFamily="18" charset="0"/>
                                       </a:rPr>
                                       <m:t>𝑳</m:t>
                                     </m:r>
@@ -11235,7 +11269,7 @@
                                         <a:solidFill>
                                           <a:schemeClr val="tx1"/>
                                         </a:solidFill>
-                                        <a:latin typeface="+mn-lt"/>
+                                        <a:latin typeface="Cambria Math" panose="02040503050406030204" pitchFamily="18" charset="0"/>
                                       </a:rPr>
                                       <m:t>+</m:t>
                                     </m:r>
@@ -11244,7 +11278,7 @@
                                         <a:solidFill>
                                           <a:schemeClr val="tx1"/>
                                         </a:solidFill>
-                                        <a:latin typeface="+mn-lt"/>
+                                        <a:latin typeface="Cambria Math" panose="02040503050406030204" pitchFamily="18" charset="0"/>
                                       </a:rPr>
                                       <m:t>𝟏</m:t>
                                     </m:r>
@@ -11317,7 +11351,7 @@
             </a:graphic>
           </p:graphicFrame>
         </mc:Choice>
-        <mc:Fallback>
+        <mc:Fallback xmlns="">
           <p:graphicFrame>
             <p:nvGraphicFramePr>
               <p:cNvPr id="17" name="Tableau 16">
@@ -11870,8 +11904,8 @@
           </a:fontRef>
         </p:style>
       </p:cxnSp>
-      <mc:AlternateContent xmlns:mc="http://schemas.openxmlformats.org/markup-compatibility/2006">
-        <mc:Choice xmlns:a14="http://schemas.microsoft.com/office/drawing/2010/main" Requires="a14">
+      <mc:AlternateContent xmlns:mc="http://schemas.openxmlformats.org/markup-compatibility/2006" xmlns:a14="http://schemas.microsoft.com/office/drawing/2010/main">
+        <mc:Choice Requires="a14">
           <p:graphicFrame>
             <p:nvGraphicFramePr>
               <p:cNvPr id="16" name="Tableau 15">
@@ -11959,6 +11993,7 @@
                         <a:bodyPr/>
                         <a:lstStyle/>
                         <a:p>
+                          <a:pPr/>
                           <a14:m>
                             <m:oMathPara xmlns:m="http://schemas.openxmlformats.org/officeDocument/2006/math">
                               <m:oMathParaPr>
@@ -11972,7 +12007,7 @@
                                         <a:solidFill>
                                           <a:schemeClr val="tx1"/>
                                         </a:solidFill>
-                                        <a:latin typeface="+mn-lt"/>
+                                        <a:latin typeface="Cambria Math" panose="02040503050406030204" pitchFamily="18" charset="0"/>
                                       </a:rPr>
                                     </m:ctrlPr>
                                   </m:sSubPr>
@@ -11982,7 +12017,7 @@
                                         <a:solidFill>
                                           <a:schemeClr val="tx1"/>
                                         </a:solidFill>
-                                        <a:latin typeface="+mn-lt"/>
+                                        <a:latin typeface="Cambria Math" panose="02040503050406030204" pitchFamily="18" charset="0"/>
                                       </a:rPr>
                                       <m:t>𝑿</m:t>
                                     </m:r>
@@ -11993,7 +12028,7 @@
                                         <a:solidFill>
                                           <a:schemeClr val="tx1"/>
                                         </a:solidFill>
-                                        <a:latin typeface="+mn-lt"/>
+                                        <a:latin typeface="Cambria Math" panose="02040503050406030204" pitchFamily="18" charset="0"/>
                                       </a:rPr>
                                       <m:t>𝟐</m:t>
                                     </m:r>
@@ -12063,6 +12098,7 @@
                         <a:bodyPr/>
                         <a:lstStyle/>
                         <a:p>
+                          <a:pPr/>
                           <a14:m>
                             <m:oMathPara xmlns:m="http://schemas.openxmlformats.org/officeDocument/2006/math">
                               <m:oMathParaPr>
@@ -12076,7 +12112,7 @@
                                         <a:solidFill>
                                           <a:schemeClr val="tx1"/>
                                         </a:solidFill>
-                                        <a:latin typeface="+mn-lt"/>
+                                        <a:latin typeface="Cambria Math" panose="02040503050406030204" pitchFamily="18" charset="0"/>
                                       </a:rPr>
                                     </m:ctrlPr>
                                   </m:sSubPr>
@@ -12086,7 +12122,7 @@
                                         <a:solidFill>
                                           <a:schemeClr val="tx1"/>
                                         </a:solidFill>
-                                        <a:latin typeface="+mn-lt"/>
+                                        <a:latin typeface="Cambria Math" panose="02040503050406030204" pitchFamily="18" charset="0"/>
                                       </a:rPr>
                                       <m:t>𝑿</m:t>
                                     </m:r>
@@ -12097,7 +12133,7 @@
                                         <a:solidFill>
                                           <a:schemeClr val="tx1"/>
                                         </a:solidFill>
-                                        <a:latin typeface="+mn-lt"/>
+                                        <a:latin typeface="Cambria Math" panose="02040503050406030204" pitchFamily="18" charset="0"/>
                                       </a:rPr>
                                       <m:t>𝟑</m:t>
                                     </m:r>
@@ -12396,6 +12432,7 @@
                         <a:bodyPr/>
                         <a:lstStyle/>
                         <a:p>
+                          <a:pPr/>
                           <a14:m>
                             <m:oMathPara xmlns:m="http://schemas.openxmlformats.org/officeDocument/2006/math">
                               <m:oMathParaPr>
@@ -12409,7 +12446,7 @@
                                         <a:solidFill>
                                           <a:schemeClr val="tx1"/>
                                         </a:solidFill>
-                                        <a:latin typeface="+mn-lt"/>
+                                        <a:latin typeface="Cambria Math" panose="02040503050406030204" pitchFamily="18" charset="0"/>
                                       </a:rPr>
                                     </m:ctrlPr>
                                   </m:sSubPr>
@@ -12419,7 +12456,7 @@
                                         <a:solidFill>
                                           <a:schemeClr val="tx1"/>
                                         </a:solidFill>
-                                        <a:latin typeface="+mn-lt"/>
+                                        <a:latin typeface="Cambria Math" panose="02040503050406030204" pitchFamily="18" charset="0"/>
                                       </a:rPr>
                                       <m:t>𝑿</m:t>
                                     </m:r>
@@ -12430,7 +12467,7 @@
                                         <a:solidFill>
                                           <a:schemeClr val="tx1"/>
                                         </a:solidFill>
-                                        <a:latin typeface="+mn-lt"/>
+                                        <a:latin typeface="Cambria Math" panose="02040503050406030204" pitchFamily="18" charset="0"/>
                                       </a:rPr>
                                       <m:t>𝑳</m:t>
                                     </m:r>
@@ -12439,7 +12476,7 @@
                                         <a:solidFill>
                                           <a:schemeClr val="tx1"/>
                                         </a:solidFill>
-                                        <a:latin typeface="+mn-lt"/>
+                                        <a:latin typeface="Cambria Math" panose="02040503050406030204" pitchFamily="18" charset="0"/>
                                       </a:rPr>
                                       <m:t>+</m:t>
                                     </m:r>
@@ -12448,7 +12485,7 @@
                                         <a:solidFill>
                                           <a:schemeClr val="tx1"/>
                                         </a:solidFill>
-                                        <a:latin typeface="+mn-lt"/>
+                                        <a:latin typeface="Cambria Math" panose="02040503050406030204" pitchFamily="18" charset="0"/>
                                       </a:rPr>
                                       <m:t>𝟏</m:t>
                                     </m:r>
@@ -12521,7 +12558,7 @@
             </a:graphic>
           </p:graphicFrame>
         </mc:Choice>
-        <mc:Fallback>
+        <mc:Fallback xmlns="">
           <p:graphicFrame>
             <p:nvGraphicFramePr>
               <p:cNvPr id="16" name="Tableau 15">
@@ -13031,8 +13068,8 @@
           </p:graphicFrame>
         </mc:Fallback>
       </mc:AlternateContent>
-      <mc:AlternateContent xmlns:mc="http://schemas.openxmlformats.org/markup-compatibility/2006">
-        <mc:Choice xmlns:a14="http://schemas.microsoft.com/office/drawing/2010/main" Requires="a14">
+      <mc:AlternateContent xmlns:mc="http://schemas.openxmlformats.org/markup-compatibility/2006" xmlns:a14="http://schemas.microsoft.com/office/drawing/2010/main">
+        <mc:Choice Requires="a14">
           <p:graphicFrame>
             <p:nvGraphicFramePr>
               <p:cNvPr id="18" name="Tableau 17">
@@ -13078,6 +13115,7 @@
                         <a:bodyPr/>
                         <a:lstStyle/>
                         <a:p>
+                          <a:pPr/>
                           <a14:m>
                             <m:oMathPara xmlns:m="http://schemas.openxmlformats.org/officeDocument/2006/math">
                               <m:oMathParaPr>
@@ -13197,7 +13235,7 @@
             </a:graphic>
           </p:graphicFrame>
         </mc:Choice>
-        <mc:Fallback>
+        <mc:Fallback xmlns="">
           <p:graphicFrame>
             <p:nvGraphicFramePr>
               <p:cNvPr id="18" name="Tableau 17">
@@ -13303,8 +13341,8 @@
           </p:graphicFrame>
         </mc:Fallback>
       </mc:AlternateContent>
-      <mc:AlternateContent xmlns:mc="http://schemas.openxmlformats.org/markup-compatibility/2006">
-        <mc:Choice xmlns:a14="http://schemas.microsoft.com/office/drawing/2010/main" Requires="a14">
+      <mc:AlternateContent xmlns:mc="http://schemas.openxmlformats.org/markup-compatibility/2006" xmlns:a14="http://schemas.microsoft.com/office/drawing/2010/main">
+        <mc:Choice Requires="a14">
           <p:graphicFrame>
             <p:nvGraphicFramePr>
               <p:cNvPr id="19" name="Tableau 18">
@@ -13487,7 +13525,7 @@
             </a:graphic>
           </p:graphicFrame>
         </mc:Choice>
-        <mc:Fallback>
+        <mc:Fallback xmlns="">
           <p:graphicFrame>
             <p:nvGraphicFramePr>
               <p:cNvPr id="19" name="Tableau 18">
@@ -13593,8 +13631,8 @@
           </p:graphicFrame>
         </mc:Fallback>
       </mc:AlternateContent>
-      <mc:AlternateContent xmlns:mc="http://schemas.openxmlformats.org/markup-compatibility/2006">
-        <mc:Choice xmlns:a14="http://schemas.microsoft.com/office/drawing/2010/main" Requires="a14">
+      <mc:AlternateContent xmlns:mc="http://schemas.openxmlformats.org/markup-compatibility/2006" xmlns:a14="http://schemas.microsoft.com/office/drawing/2010/main">
+        <mc:Choice Requires="a14">
           <p:graphicFrame>
             <p:nvGraphicFramePr>
               <p:cNvPr id="25" name="Tableau 24">
@@ -13640,6 +13678,7 @@
                         <a:bodyPr/>
                         <a:lstStyle/>
                         <a:p>
+                          <a:pPr/>
                           <a14:m>
                             <m:oMathPara xmlns:m="http://schemas.openxmlformats.org/officeDocument/2006/math">
                               <m:oMathParaPr>
@@ -13754,7 +13793,7 @@
             </a:graphic>
           </p:graphicFrame>
         </mc:Choice>
-        <mc:Fallback>
+        <mc:Fallback xmlns="">
           <p:graphicFrame>
             <p:nvGraphicFramePr>
               <p:cNvPr id="25" name="Tableau 24">
@@ -14594,7 +14633,7 @@
         </p:nvSpPr>
         <p:spPr>
           <a:xfrm rot="16200000">
-            <a:off x="4410853" y="2157745"/>
+            <a:off x="3908829" y="2202568"/>
             <a:ext cx="1866900" cy="519957"/>
           </a:xfrm>
           <a:prstGeom prst="roundRect">
@@ -14643,21 +14682,8 @@
                   <a:schemeClr val="tx1"/>
                 </a:solidFill>
               </a:rPr>
-              <a:t>LSTM </a:t>
+              <a:t>LSTM</a:t>
             </a:r>
-            <a:r>
-              <a:rPr lang="fr-FR" dirty="0" err="1">
-                <a:solidFill>
-                  <a:schemeClr val="tx1"/>
-                </a:solidFill>
-              </a:rPr>
-              <a:t>ReLU</a:t>
-            </a:r>
-            <a:endParaRPr lang="fr-FR" dirty="0">
-              <a:solidFill>
-                <a:schemeClr val="tx1"/>
-              </a:solidFill>
-            </a:endParaRPr>
           </a:p>
         </p:txBody>
       </p:sp>
@@ -14675,7 +14701,7 @@
         </p:nvSpPr>
         <p:spPr>
           <a:xfrm rot="16200000">
-            <a:off x="3614837" y="2157745"/>
+            <a:off x="3112813" y="2202568"/>
             <a:ext cx="1866900" cy="519957"/>
           </a:xfrm>
           <a:prstGeom prst="roundRect">
@@ -14734,7 +14760,7 @@
         </p:nvSpPr>
         <p:spPr>
           <a:xfrm rot="16200000">
-            <a:off x="5206869" y="2157743"/>
+            <a:off x="5798544" y="2202566"/>
             <a:ext cx="1866900" cy="519957"/>
           </a:xfrm>
           <a:prstGeom prst="roundRect">
@@ -14783,21 +14809,8 @@
                   <a:schemeClr val="tx1"/>
                 </a:solidFill>
               </a:rPr>
-              <a:t>LSTM  </a:t>
+              <a:t>LSTM</a:t>
             </a:r>
-            <a:r>
-              <a:rPr lang="fr-FR" dirty="0" err="1">
-                <a:solidFill>
-                  <a:schemeClr val="tx1"/>
-                </a:solidFill>
-              </a:rPr>
-              <a:t>ReLU</a:t>
-            </a:r>
-            <a:endParaRPr lang="fr-FR" dirty="0">
-              <a:solidFill>
-                <a:schemeClr val="tx1"/>
-              </a:solidFill>
-            </a:endParaRPr>
           </a:p>
         </p:txBody>
       </p:sp>
@@ -14815,7 +14828,7 @@
         </p:nvSpPr>
         <p:spPr>
           <a:xfrm rot="16200000">
-            <a:off x="5983874" y="2157743"/>
+            <a:off x="6602439" y="2202566"/>
             <a:ext cx="1866900" cy="519957"/>
           </a:xfrm>
           <a:prstGeom prst="roundRect">
@@ -14863,21 +14876,8 @@
                   <a:schemeClr val="tx1"/>
                 </a:solidFill>
               </a:rPr>
-              <a:t>Dense </a:t>
+              <a:t>Dense</a:t>
             </a:r>
-            <a:r>
-              <a:rPr lang="fr-FR" dirty="0" err="1">
-                <a:solidFill>
-                  <a:schemeClr val="tx1"/>
-                </a:solidFill>
-              </a:rPr>
-              <a:t>ReLU</a:t>
-            </a:r>
-            <a:endParaRPr lang="fr-FR" dirty="0">
-              <a:solidFill>
-                <a:schemeClr val="tx1"/>
-              </a:solidFill>
-            </a:endParaRPr>
           </a:p>
         </p:txBody>
       </p:sp>
@@ -14895,7 +14895,7 @@
         </p:nvSpPr>
         <p:spPr>
           <a:xfrm>
-            <a:off x="7568851" y="2148894"/>
+            <a:off x="8187416" y="2193717"/>
             <a:ext cx="519958" cy="537651"/>
           </a:xfrm>
           <a:prstGeom prst="ellipse">
@@ -14957,7 +14957,7 @@
         </p:nvCxnSpPr>
         <p:spPr>
           <a:xfrm>
-            <a:off x="4808266" y="2417724"/>
+            <a:off x="4306242" y="2462547"/>
             <a:ext cx="276059" cy="0"/>
           </a:xfrm>
           <a:prstGeom prst="straightConnector1">
@@ -14999,7 +14999,7 @@
         </p:nvCxnSpPr>
         <p:spPr>
           <a:xfrm>
-            <a:off x="5604282" y="2417721"/>
+            <a:off x="6195957" y="2462544"/>
             <a:ext cx="276059" cy="0"/>
           </a:xfrm>
           <a:prstGeom prst="straightConnector1">
@@ -15044,7 +15044,7 @@
         </p:nvCxnSpPr>
         <p:spPr>
           <a:xfrm>
-            <a:off x="6400298" y="2417721"/>
+            <a:off x="7018863" y="2462544"/>
             <a:ext cx="257048" cy="1"/>
           </a:xfrm>
           <a:prstGeom prst="straightConnector1">
@@ -15090,7 +15090,7 @@
         </p:nvCxnSpPr>
         <p:spPr>
           <a:xfrm flipV="1">
-            <a:off x="7177303" y="2417720"/>
+            <a:off x="7795868" y="2462543"/>
             <a:ext cx="391548" cy="2"/>
           </a:xfrm>
           <a:prstGeom prst="straightConnector1">
@@ -15134,7 +15134,7 @@
         </p:nvCxnSpPr>
         <p:spPr>
           <a:xfrm>
-            <a:off x="3511685" y="2417720"/>
+            <a:off x="3009661" y="2462543"/>
             <a:ext cx="776623" cy="2022"/>
           </a:xfrm>
           <a:prstGeom prst="straightConnector1">
@@ -15179,7 +15179,7 @@
         </p:nvCxnSpPr>
         <p:spPr>
           <a:xfrm>
-            <a:off x="8088809" y="2417720"/>
+            <a:off x="8707374" y="2462543"/>
             <a:ext cx="943007" cy="0"/>
           </a:xfrm>
           <a:prstGeom prst="straightConnector1">
@@ -15221,7 +15221,7 @@
         </p:nvSpPr>
         <p:spPr>
           <a:xfrm>
-            <a:off x="3978612" y="1128409"/>
+            <a:off x="3476588" y="1173232"/>
             <a:ext cx="4533247" cy="2756589"/>
           </a:xfrm>
           <a:prstGeom prst="rect">
@@ -15268,7 +15268,7 @@
         </p:nvSpPr>
         <p:spPr>
           <a:xfrm>
-            <a:off x="7184843" y="2714378"/>
+            <a:off x="7803408" y="2759201"/>
             <a:ext cx="1327016" cy="369332"/>
           </a:xfrm>
           <a:prstGeom prst="rect">
@@ -15294,6 +15294,87 @@
           </a:p>
         </p:txBody>
       </p:sp>
+      <p:cxnSp>
+        <p:nvCxnSpPr>
+          <p:cNvPr id="4" name="Connecteur droit avec flèche 3">
+            <a:extLst>
+              <a:ext uri="{FF2B5EF4-FFF2-40B4-BE49-F238E27FC236}">
+                <a16:creationId xmlns:a16="http://schemas.microsoft.com/office/drawing/2014/main" id="{F039B440-BA93-315C-8DE4-E28301A3B14A}"/>
+              </a:ext>
+            </a:extLst>
+          </p:cNvPr>
+          <p:cNvCxnSpPr/>
+          <p:nvPr/>
+        </p:nvCxnSpPr>
+        <p:spPr>
+          <a:xfrm>
+            <a:off x="5102258" y="2450828"/>
+            <a:ext cx="276059" cy="0"/>
+          </a:xfrm>
+          <a:prstGeom prst="straightConnector1">
+            <a:avLst/>
+          </a:prstGeom>
+          <a:ln w="38100">
+            <a:solidFill>
+              <a:schemeClr val="tx1"/>
+            </a:solidFill>
+            <a:tailEnd type="triangle"/>
+          </a:ln>
+        </p:spPr>
+        <p:style>
+          <a:lnRef idx="1">
+            <a:schemeClr val="accent1"/>
+          </a:lnRef>
+          <a:fillRef idx="0">
+            <a:schemeClr val="accent1"/>
+          </a:fillRef>
+          <a:effectRef idx="0">
+            <a:schemeClr val="accent1"/>
+          </a:effectRef>
+          <a:fontRef idx="minor">
+            <a:schemeClr val="tx1"/>
+          </a:fontRef>
+        </p:style>
+      </p:cxnSp>
+      <p:cxnSp>
+        <p:nvCxnSpPr>
+          <p:cNvPr id="6" name="Connecteur droit 5">
+            <a:extLst>
+              <a:ext uri="{FF2B5EF4-FFF2-40B4-BE49-F238E27FC236}">
+                <a16:creationId xmlns:a16="http://schemas.microsoft.com/office/drawing/2014/main" id="{02919DD9-7C3F-9C72-06F0-5354984472E1}"/>
+              </a:ext>
+            </a:extLst>
+          </p:cNvPr>
+          <p:cNvCxnSpPr/>
+          <p:nvPr/>
+        </p:nvCxnSpPr>
+        <p:spPr>
+          <a:xfrm>
+            <a:off x="5378317" y="2450828"/>
+            <a:ext cx="817640" cy="11715"/>
+          </a:xfrm>
+          <a:prstGeom prst="line">
+            <a:avLst/>
+          </a:prstGeom>
+          <a:ln>
+            <a:prstDash val="sysDot"/>
+          </a:ln>
+        </p:spPr>
+        <p:style>
+          <a:lnRef idx="3">
+            <a:schemeClr val="dk1"/>
+          </a:lnRef>
+          <a:fillRef idx="0">
+            <a:schemeClr val="dk1"/>
+          </a:fillRef>
+          <a:effectRef idx="2">
+            <a:schemeClr val="dk1"/>
+          </a:effectRef>
+          <a:fontRef idx="minor">
+            <a:schemeClr val="tx1"/>
+          </a:fontRef>
+        </p:style>
+      </p:cxnSp>
     </p:spTree>
     <p:extLst>
       <p:ext uri="{BB962C8B-B14F-4D97-AF65-F5344CB8AC3E}">

--- a/src/streamlit/Chap3/Présentation1.pptx
+++ b/src/streamlit/Chap3/Présentation1.pptx
@@ -14619,762 +14619,783 @@
           <a:chExt cx="0" cy="0"/>
         </a:xfrm>
       </p:grpSpPr>
-      <p:sp>
-        <p:nvSpPr>
-          <p:cNvPr id="8" name="Rectangle : coins arrondis 7">
+      <p:grpSp>
+        <p:nvGrpSpPr>
+          <p:cNvPr id="7" name="Groupe 6">
             <a:extLst>
               <a:ext uri="{FF2B5EF4-FFF2-40B4-BE49-F238E27FC236}">
-                <a16:creationId xmlns:a16="http://schemas.microsoft.com/office/drawing/2014/main" id="{55F59E50-F309-0CB9-9E6E-59B2A7C4EBE9}"/>
+                <a16:creationId xmlns:a16="http://schemas.microsoft.com/office/drawing/2014/main" id="{8B88701F-7399-5295-4CA1-3FF2B6D50224}"/>
               </a:ext>
             </a:extLst>
           </p:cNvPr>
-          <p:cNvSpPr/>
+          <p:cNvGrpSpPr/>
           <p:nvPr/>
-        </p:nvSpPr>
-        <p:spPr>
-          <a:xfrm rot="16200000">
-            <a:off x="3908829" y="2202568"/>
-            <a:ext cx="1866900" cy="519957"/>
+        </p:nvGrpSpPr>
+        <p:grpSpPr>
+          <a:xfrm>
+            <a:off x="3009661" y="1173232"/>
+            <a:ext cx="6640720" cy="2499779"/>
+            <a:chOff x="3009661" y="1173232"/>
+            <a:chExt cx="6640720" cy="2499779"/>
           </a:xfrm>
-          <a:prstGeom prst="roundRect">
-            <a:avLst/>
-          </a:prstGeom>
-          <a:solidFill>
-            <a:schemeClr val="accent6">
-              <a:lumMod val="40000"/>
-              <a:lumOff val="60000"/>
-              <a:alpha val="55000"/>
-            </a:schemeClr>
-          </a:solidFill>
-          <a:ln w="25400">
+        </p:grpSpPr>
+        <p:sp>
+          <p:nvSpPr>
+            <p:cNvPr id="8" name="Rectangle : coins arrondis 7">
+              <a:extLst>
+                <a:ext uri="{FF2B5EF4-FFF2-40B4-BE49-F238E27FC236}">
+                  <a16:creationId xmlns:a16="http://schemas.microsoft.com/office/drawing/2014/main" id="{55F59E50-F309-0CB9-9E6E-59B2A7C4EBE9}"/>
+                </a:ext>
+              </a:extLst>
+            </p:cNvPr>
+            <p:cNvSpPr/>
+            <p:nvPr/>
+          </p:nvSpPr>
+          <p:spPr>
+            <a:xfrm rot="16200000">
+              <a:off x="3908829" y="2202568"/>
+              <a:ext cx="1866900" cy="519957"/>
+            </a:xfrm>
+            <a:prstGeom prst="roundRect">
+              <a:avLst/>
+            </a:prstGeom>
             <a:solidFill>
               <a:schemeClr val="accent6">
                 <a:lumMod val="40000"/>
                 <a:lumOff val="60000"/>
+                <a:alpha val="55000"/>
               </a:schemeClr>
             </a:solidFill>
-          </a:ln>
-        </p:spPr>
-        <p:style>
-          <a:lnRef idx="2">
-            <a:schemeClr val="accent1">
-              <a:shade val="15000"/>
-            </a:schemeClr>
-          </a:lnRef>
-          <a:fillRef idx="1">
-            <a:schemeClr val="accent1"/>
-          </a:fillRef>
-          <a:effectRef idx="0">
-            <a:schemeClr val="accent1"/>
-          </a:effectRef>
-          <a:fontRef idx="minor">
-            <a:schemeClr val="lt1"/>
-          </a:fontRef>
-        </p:style>
-        <p:txBody>
-          <a:bodyPr rtlCol="0" anchor="ctr"/>
-          <a:lstStyle/>
-          <a:p>
-            <a:pPr algn="ctr"/>
-            <a:r>
-              <a:rPr lang="fr-FR" dirty="0">
-                <a:solidFill>
-                  <a:schemeClr val="tx1"/>
-                </a:solidFill>
-              </a:rPr>
-              <a:t>LSTM</a:t>
-            </a:r>
-          </a:p>
-        </p:txBody>
-      </p:sp>
-      <p:sp>
-        <p:nvSpPr>
-          <p:cNvPr id="2" name="Rectangle : coins arrondis 1">
-            <a:extLst>
-              <a:ext uri="{FF2B5EF4-FFF2-40B4-BE49-F238E27FC236}">
-                <a16:creationId xmlns:a16="http://schemas.microsoft.com/office/drawing/2014/main" id="{3C75446E-841A-F8D2-F77B-92A5085DA15C}"/>
-              </a:ext>
-            </a:extLst>
-          </p:cNvPr>
-          <p:cNvSpPr/>
-          <p:nvPr/>
-        </p:nvSpPr>
-        <p:spPr>
-          <a:xfrm rot="16200000">
-            <a:off x="3112813" y="2202568"/>
-            <a:ext cx="1866900" cy="519957"/>
-          </a:xfrm>
-          <a:prstGeom prst="roundRect">
-            <a:avLst/>
-          </a:prstGeom>
-          <a:solidFill>
-            <a:schemeClr val="accent1">
-              <a:alpha val="13000"/>
-            </a:schemeClr>
-          </a:solidFill>
-          <a:ln w="25400"/>
-        </p:spPr>
-        <p:style>
-          <a:lnRef idx="2">
-            <a:schemeClr val="accent1">
-              <a:shade val="15000"/>
-            </a:schemeClr>
-          </a:lnRef>
-          <a:fillRef idx="1">
-            <a:schemeClr val="accent1"/>
-          </a:fillRef>
-          <a:effectRef idx="0">
-            <a:schemeClr val="accent1"/>
-          </a:effectRef>
-          <a:fontRef idx="minor">
-            <a:schemeClr val="lt1"/>
-          </a:fontRef>
-        </p:style>
-        <p:txBody>
-          <a:bodyPr rtlCol="0" anchor="ctr"/>
-          <a:lstStyle/>
-          <a:p>
-            <a:pPr algn="ctr"/>
-            <a:r>
-              <a:rPr lang="fr-FR" dirty="0">
-                <a:solidFill>
-                  <a:schemeClr val="tx1"/>
-                </a:solidFill>
-              </a:rPr>
-              <a:t>INPUT</a:t>
-            </a:r>
-          </a:p>
-        </p:txBody>
-      </p:sp>
-      <p:sp>
-        <p:nvSpPr>
-          <p:cNvPr id="3" name="Rectangle : coins arrondis 2">
-            <a:extLst>
-              <a:ext uri="{FF2B5EF4-FFF2-40B4-BE49-F238E27FC236}">
-                <a16:creationId xmlns:a16="http://schemas.microsoft.com/office/drawing/2014/main" id="{84E989CF-6CDC-5FE7-32F2-48B934AA39D7}"/>
-              </a:ext>
-            </a:extLst>
-          </p:cNvPr>
-          <p:cNvSpPr/>
-          <p:nvPr/>
-        </p:nvSpPr>
-        <p:spPr>
-          <a:xfrm rot="16200000">
-            <a:off x="5798544" y="2202566"/>
-            <a:ext cx="1866900" cy="519957"/>
-          </a:xfrm>
-          <a:prstGeom prst="roundRect">
-            <a:avLst/>
-          </a:prstGeom>
-          <a:solidFill>
-            <a:schemeClr val="accent6">
-              <a:lumMod val="40000"/>
-              <a:lumOff val="60000"/>
-              <a:alpha val="55000"/>
-            </a:schemeClr>
-          </a:solidFill>
-          <a:ln w="25400">
+            <a:ln w="25400">
+              <a:solidFill>
+                <a:schemeClr val="accent6">
+                  <a:lumMod val="40000"/>
+                  <a:lumOff val="60000"/>
+                </a:schemeClr>
+              </a:solidFill>
+            </a:ln>
+          </p:spPr>
+          <p:style>
+            <a:lnRef idx="2">
+              <a:schemeClr val="accent1">
+                <a:shade val="15000"/>
+              </a:schemeClr>
+            </a:lnRef>
+            <a:fillRef idx="1">
+              <a:schemeClr val="accent1"/>
+            </a:fillRef>
+            <a:effectRef idx="0">
+              <a:schemeClr val="accent1"/>
+            </a:effectRef>
+            <a:fontRef idx="minor">
+              <a:schemeClr val="lt1"/>
+            </a:fontRef>
+          </p:style>
+          <p:txBody>
+            <a:bodyPr rtlCol="0" anchor="ctr"/>
+            <a:lstStyle/>
+            <a:p>
+              <a:pPr algn="ctr"/>
+              <a:r>
+                <a:rPr lang="fr-FR" dirty="0">
+                  <a:solidFill>
+                    <a:schemeClr val="tx1"/>
+                  </a:solidFill>
+                </a:rPr>
+                <a:t>LSTM</a:t>
+              </a:r>
+            </a:p>
+          </p:txBody>
+        </p:sp>
+        <p:sp>
+          <p:nvSpPr>
+            <p:cNvPr id="2" name="Rectangle : coins arrondis 1">
+              <a:extLst>
+                <a:ext uri="{FF2B5EF4-FFF2-40B4-BE49-F238E27FC236}">
+                  <a16:creationId xmlns:a16="http://schemas.microsoft.com/office/drawing/2014/main" id="{3C75446E-841A-F8D2-F77B-92A5085DA15C}"/>
+                </a:ext>
+              </a:extLst>
+            </p:cNvPr>
+            <p:cNvSpPr/>
+            <p:nvPr/>
+          </p:nvSpPr>
+          <p:spPr>
+            <a:xfrm rot="16200000">
+              <a:off x="3112813" y="2202568"/>
+              <a:ext cx="1866900" cy="519957"/>
+            </a:xfrm>
+            <a:prstGeom prst="roundRect">
+              <a:avLst/>
+            </a:prstGeom>
+            <a:solidFill>
+              <a:schemeClr val="accent1">
+                <a:alpha val="13000"/>
+              </a:schemeClr>
+            </a:solidFill>
+            <a:ln w="25400"/>
+          </p:spPr>
+          <p:style>
+            <a:lnRef idx="2">
+              <a:schemeClr val="accent1">
+                <a:shade val="15000"/>
+              </a:schemeClr>
+            </a:lnRef>
+            <a:fillRef idx="1">
+              <a:schemeClr val="accent1"/>
+            </a:fillRef>
+            <a:effectRef idx="0">
+              <a:schemeClr val="accent1"/>
+            </a:effectRef>
+            <a:fontRef idx="minor">
+              <a:schemeClr val="lt1"/>
+            </a:fontRef>
+          </p:style>
+          <p:txBody>
+            <a:bodyPr rtlCol="0" anchor="ctr"/>
+            <a:lstStyle/>
+            <a:p>
+              <a:pPr algn="ctr"/>
+              <a:r>
+                <a:rPr lang="fr-FR" dirty="0">
+                  <a:solidFill>
+                    <a:schemeClr val="tx1"/>
+                  </a:solidFill>
+                </a:rPr>
+                <a:t>INPUT</a:t>
+              </a:r>
+            </a:p>
+          </p:txBody>
+        </p:sp>
+        <p:sp>
+          <p:nvSpPr>
+            <p:cNvPr id="3" name="Rectangle : coins arrondis 2">
+              <a:extLst>
+                <a:ext uri="{FF2B5EF4-FFF2-40B4-BE49-F238E27FC236}">
+                  <a16:creationId xmlns:a16="http://schemas.microsoft.com/office/drawing/2014/main" id="{84E989CF-6CDC-5FE7-32F2-48B934AA39D7}"/>
+                </a:ext>
+              </a:extLst>
+            </p:cNvPr>
+            <p:cNvSpPr/>
+            <p:nvPr/>
+          </p:nvSpPr>
+          <p:spPr>
+            <a:xfrm rot="16200000">
+              <a:off x="5798544" y="2202566"/>
+              <a:ext cx="1866900" cy="519957"/>
+            </a:xfrm>
+            <a:prstGeom prst="roundRect">
+              <a:avLst/>
+            </a:prstGeom>
             <a:solidFill>
               <a:schemeClr val="accent6">
                 <a:lumMod val="40000"/>
                 <a:lumOff val="60000"/>
+                <a:alpha val="55000"/>
               </a:schemeClr>
             </a:solidFill>
-          </a:ln>
-        </p:spPr>
-        <p:style>
-          <a:lnRef idx="2">
-            <a:schemeClr val="accent1">
-              <a:shade val="15000"/>
-            </a:schemeClr>
-          </a:lnRef>
-          <a:fillRef idx="1">
-            <a:schemeClr val="accent1"/>
-          </a:fillRef>
-          <a:effectRef idx="0">
-            <a:schemeClr val="accent1"/>
-          </a:effectRef>
-          <a:fontRef idx="minor">
-            <a:schemeClr val="lt1"/>
-          </a:fontRef>
-        </p:style>
-        <p:txBody>
-          <a:bodyPr rtlCol="0" anchor="ctr"/>
-          <a:lstStyle/>
-          <a:p>
-            <a:pPr algn="ctr"/>
-            <a:r>
-              <a:rPr lang="fr-FR" dirty="0">
+            <a:ln w="25400">
+              <a:solidFill>
+                <a:schemeClr val="accent6">
+                  <a:lumMod val="40000"/>
+                  <a:lumOff val="60000"/>
+                </a:schemeClr>
+              </a:solidFill>
+            </a:ln>
+          </p:spPr>
+          <p:style>
+            <a:lnRef idx="2">
+              <a:schemeClr val="accent1">
+                <a:shade val="15000"/>
+              </a:schemeClr>
+            </a:lnRef>
+            <a:fillRef idx="1">
+              <a:schemeClr val="accent1"/>
+            </a:fillRef>
+            <a:effectRef idx="0">
+              <a:schemeClr val="accent1"/>
+            </a:effectRef>
+            <a:fontRef idx="minor">
+              <a:schemeClr val="lt1"/>
+            </a:fontRef>
+          </p:style>
+          <p:txBody>
+            <a:bodyPr rtlCol="0" anchor="ctr"/>
+            <a:lstStyle/>
+            <a:p>
+              <a:pPr algn="ctr"/>
+              <a:r>
+                <a:rPr lang="fr-FR" dirty="0">
+                  <a:solidFill>
+                    <a:schemeClr val="tx1"/>
+                  </a:solidFill>
+                </a:rPr>
+                <a:t>LSTM</a:t>
+              </a:r>
+            </a:p>
+          </p:txBody>
+        </p:sp>
+        <p:sp>
+          <p:nvSpPr>
+            <p:cNvPr id="9" name="Rectangle : coins arrondis 8">
+              <a:extLst>
+                <a:ext uri="{FF2B5EF4-FFF2-40B4-BE49-F238E27FC236}">
+                  <a16:creationId xmlns:a16="http://schemas.microsoft.com/office/drawing/2014/main" id="{004D7407-D8C9-51D9-E4C8-35351D6B96C6}"/>
+                </a:ext>
+              </a:extLst>
+            </p:cNvPr>
+            <p:cNvSpPr/>
+            <p:nvPr/>
+          </p:nvSpPr>
+          <p:spPr>
+            <a:xfrm rot="16200000">
+              <a:off x="6602439" y="2202566"/>
+              <a:ext cx="1866900" cy="519957"/>
+            </a:xfrm>
+            <a:prstGeom prst="roundRect">
+              <a:avLst/>
+            </a:prstGeom>
+            <a:solidFill>
+              <a:schemeClr val="tx2">
+                <a:lumMod val="60000"/>
+                <a:lumOff val="40000"/>
+                <a:alpha val="58000"/>
+              </a:schemeClr>
+            </a:solidFill>
+            <a:ln w="25400">
+              <a:solidFill>
+                <a:schemeClr val="tx2">
+                  <a:alpha val="50000"/>
+                </a:schemeClr>
+              </a:solidFill>
+            </a:ln>
+          </p:spPr>
+          <p:style>
+            <a:lnRef idx="2">
+              <a:schemeClr val="accent1">
+                <a:shade val="15000"/>
+              </a:schemeClr>
+            </a:lnRef>
+            <a:fillRef idx="1">
+              <a:schemeClr val="accent1"/>
+            </a:fillRef>
+            <a:effectRef idx="0">
+              <a:schemeClr val="accent1"/>
+            </a:effectRef>
+            <a:fontRef idx="minor">
+              <a:schemeClr val="lt1"/>
+            </a:fontRef>
+          </p:style>
+          <p:txBody>
+            <a:bodyPr rtlCol="0" anchor="ctr"/>
+            <a:lstStyle/>
+            <a:p>
+              <a:pPr algn="ctr"/>
+              <a:r>
+                <a:rPr lang="fr-FR" dirty="0">
+                  <a:solidFill>
+                    <a:schemeClr val="tx1"/>
+                  </a:solidFill>
+                </a:rPr>
+                <a:t>Dense</a:t>
+              </a:r>
+            </a:p>
+          </p:txBody>
+        </p:sp>
+        <p:sp>
+          <p:nvSpPr>
+            <p:cNvPr id="11" name="Ellipse 10">
+              <a:extLst>
+                <a:ext uri="{FF2B5EF4-FFF2-40B4-BE49-F238E27FC236}">
+                  <a16:creationId xmlns:a16="http://schemas.microsoft.com/office/drawing/2014/main" id="{8F3412B7-7C80-596F-A5A9-6F60FF9527D6}"/>
+                </a:ext>
+              </a:extLst>
+            </p:cNvPr>
+            <p:cNvSpPr/>
+            <p:nvPr/>
+          </p:nvSpPr>
+          <p:spPr>
+            <a:xfrm>
+              <a:off x="8187416" y="2193717"/>
+              <a:ext cx="519958" cy="537651"/>
+            </a:xfrm>
+            <a:prstGeom prst="ellipse">
+              <a:avLst/>
+            </a:prstGeom>
+            <a:solidFill>
+              <a:schemeClr val="accent1"/>
+            </a:solidFill>
+            <a:ln w="25400">
+              <a:solidFill>
+                <a:srgbClr val="002060"/>
+              </a:solidFill>
+            </a:ln>
+          </p:spPr>
+          <p:style>
+            <a:lnRef idx="2">
+              <a:schemeClr val="accent1">
+                <a:shade val="15000"/>
+              </a:schemeClr>
+            </a:lnRef>
+            <a:fillRef idx="1">
+              <a:schemeClr val="accent1"/>
+            </a:fillRef>
+            <a:effectRef idx="0">
+              <a:schemeClr val="accent1"/>
+            </a:effectRef>
+            <a:fontRef idx="minor">
+              <a:schemeClr val="lt1"/>
+            </a:fontRef>
+          </p:style>
+          <p:txBody>
+            <a:bodyPr rtlCol="0" anchor="ctr"/>
+            <a:lstStyle/>
+            <a:p>
+              <a:pPr algn="ctr"/>
+              <a:endParaRPr lang="fr-FR" sz="1200" b="1" dirty="0">
                 <a:solidFill>
                   <a:schemeClr val="tx1"/>
                 </a:solidFill>
-              </a:rPr>
-              <a:t>LSTM</a:t>
-            </a:r>
-          </a:p>
-        </p:txBody>
-      </p:sp>
-      <p:sp>
-        <p:nvSpPr>
-          <p:cNvPr id="9" name="Rectangle : coins arrondis 8">
-            <a:extLst>
-              <a:ext uri="{FF2B5EF4-FFF2-40B4-BE49-F238E27FC236}">
-                <a16:creationId xmlns:a16="http://schemas.microsoft.com/office/drawing/2014/main" id="{004D7407-D8C9-51D9-E4C8-35351D6B96C6}"/>
-              </a:ext>
-            </a:extLst>
-          </p:cNvPr>
-          <p:cNvSpPr/>
-          <p:nvPr/>
-        </p:nvSpPr>
-        <p:spPr>
-          <a:xfrm rot="16200000">
-            <a:off x="6602439" y="2202566"/>
-            <a:ext cx="1866900" cy="519957"/>
-          </a:xfrm>
-          <a:prstGeom prst="roundRect">
-            <a:avLst/>
-          </a:prstGeom>
-          <a:solidFill>
-            <a:schemeClr val="tx2">
-              <a:lumMod val="60000"/>
-              <a:lumOff val="40000"/>
-              <a:alpha val="58000"/>
-            </a:schemeClr>
-          </a:solidFill>
-          <a:ln w="25400">
-            <a:solidFill>
-              <a:schemeClr val="tx2">
-                <a:alpha val="50000"/>
-              </a:schemeClr>
-            </a:solidFill>
-          </a:ln>
-        </p:spPr>
-        <p:style>
-          <a:lnRef idx="2">
-            <a:schemeClr val="accent1">
-              <a:shade val="15000"/>
-            </a:schemeClr>
-          </a:lnRef>
-          <a:fillRef idx="1">
-            <a:schemeClr val="accent1"/>
-          </a:fillRef>
-          <a:effectRef idx="0">
-            <a:schemeClr val="accent1"/>
-          </a:effectRef>
-          <a:fontRef idx="minor">
-            <a:schemeClr val="lt1"/>
-          </a:fontRef>
-        </p:style>
-        <p:txBody>
-          <a:bodyPr rtlCol="0" anchor="ctr"/>
-          <a:lstStyle/>
-          <a:p>
-            <a:pPr algn="ctr"/>
-            <a:r>
-              <a:rPr lang="fr-FR" dirty="0">
-                <a:solidFill>
-                  <a:schemeClr val="tx1"/>
-                </a:solidFill>
-              </a:rPr>
-              <a:t>Dense</a:t>
-            </a:r>
-          </a:p>
-        </p:txBody>
-      </p:sp>
-      <p:sp>
-        <p:nvSpPr>
-          <p:cNvPr id="11" name="Ellipse 10">
-            <a:extLst>
-              <a:ext uri="{FF2B5EF4-FFF2-40B4-BE49-F238E27FC236}">
-                <a16:creationId xmlns:a16="http://schemas.microsoft.com/office/drawing/2014/main" id="{8F3412B7-7C80-596F-A5A9-6F60FF9527D6}"/>
-              </a:ext>
-            </a:extLst>
-          </p:cNvPr>
-          <p:cNvSpPr/>
-          <p:nvPr/>
-        </p:nvSpPr>
-        <p:spPr>
-          <a:xfrm>
-            <a:off x="8187416" y="2193717"/>
-            <a:ext cx="519958" cy="537651"/>
-          </a:xfrm>
-          <a:prstGeom prst="ellipse">
-            <a:avLst/>
-          </a:prstGeom>
-          <a:solidFill>
-            <a:schemeClr val="accent1"/>
-          </a:solidFill>
-          <a:ln w="25400">
-            <a:solidFill>
-              <a:srgbClr val="002060"/>
-            </a:solidFill>
-          </a:ln>
-        </p:spPr>
-        <p:style>
-          <a:lnRef idx="2">
-            <a:schemeClr val="accent1">
-              <a:shade val="15000"/>
-            </a:schemeClr>
-          </a:lnRef>
-          <a:fillRef idx="1">
-            <a:schemeClr val="accent1"/>
-          </a:fillRef>
-          <a:effectRef idx="0">
-            <a:schemeClr val="accent1"/>
-          </a:effectRef>
-          <a:fontRef idx="minor">
-            <a:schemeClr val="lt1"/>
-          </a:fontRef>
-        </p:style>
-        <p:txBody>
-          <a:bodyPr rtlCol="0" anchor="ctr"/>
-          <a:lstStyle/>
-          <a:p>
-            <a:pPr algn="ctr"/>
-            <a:endParaRPr lang="fr-FR" sz="1200" b="1" dirty="0">
+              </a:endParaRPr>
+            </a:p>
+          </p:txBody>
+        </p:sp>
+        <p:cxnSp>
+          <p:nvCxnSpPr>
+            <p:cNvPr id="13" name="Connecteur droit avec flèche 12">
+              <a:extLst>
+                <a:ext uri="{FF2B5EF4-FFF2-40B4-BE49-F238E27FC236}">
+                  <a16:creationId xmlns:a16="http://schemas.microsoft.com/office/drawing/2014/main" id="{CD0E8F79-90A7-5CE8-8C7A-0AADCB975DBA}"/>
+                </a:ext>
+              </a:extLst>
+            </p:cNvPr>
+            <p:cNvCxnSpPr>
+              <a:cxnSpLocks/>
+              <a:stCxn id="2" idx="2"/>
+              <a:endCxn id="8" idx="0"/>
+            </p:cNvCxnSpPr>
+            <p:nvPr/>
+          </p:nvCxnSpPr>
+          <p:spPr>
+            <a:xfrm>
+              <a:off x="4306242" y="2462547"/>
+              <a:ext cx="276059" cy="0"/>
+            </a:xfrm>
+            <a:prstGeom prst="straightConnector1">
+              <a:avLst/>
+            </a:prstGeom>
+            <a:ln w="38100">
               <a:solidFill>
                 <a:schemeClr val="tx1"/>
               </a:solidFill>
-            </a:endParaRPr>
-          </a:p>
-        </p:txBody>
-      </p:sp>
-      <p:cxnSp>
-        <p:nvCxnSpPr>
-          <p:cNvPr id="13" name="Connecteur droit avec flèche 12">
-            <a:extLst>
-              <a:ext uri="{FF2B5EF4-FFF2-40B4-BE49-F238E27FC236}">
-                <a16:creationId xmlns:a16="http://schemas.microsoft.com/office/drawing/2014/main" id="{CD0E8F79-90A7-5CE8-8C7A-0AADCB975DBA}"/>
-              </a:ext>
-            </a:extLst>
-          </p:cNvPr>
-          <p:cNvCxnSpPr>
-            <a:cxnSpLocks/>
-            <a:stCxn id="2" idx="2"/>
-            <a:endCxn id="8" idx="0"/>
-          </p:cNvCxnSpPr>
-          <p:nvPr/>
-        </p:nvCxnSpPr>
-        <p:spPr>
-          <a:xfrm>
-            <a:off x="4306242" y="2462547"/>
-            <a:ext cx="276059" cy="0"/>
-          </a:xfrm>
-          <a:prstGeom prst="straightConnector1">
-            <a:avLst/>
-          </a:prstGeom>
-          <a:ln w="38100">
-            <a:solidFill>
+              <a:tailEnd type="triangle"/>
+            </a:ln>
+          </p:spPr>
+          <p:style>
+            <a:lnRef idx="1">
+              <a:schemeClr val="accent1"/>
+            </a:lnRef>
+            <a:fillRef idx="0">
+              <a:schemeClr val="accent1"/>
+            </a:fillRef>
+            <a:effectRef idx="0">
+              <a:schemeClr val="accent1"/>
+            </a:effectRef>
+            <a:fontRef idx="minor">
               <a:schemeClr val="tx1"/>
-            </a:solidFill>
-            <a:tailEnd type="triangle"/>
-          </a:ln>
-        </p:spPr>
-        <p:style>
-          <a:lnRef idx="1">
-            <a:schemeClr val="accent1"/>
-          </a:lnRef>
-          <a:fillRef idx="0">
-            <a:schemeClr val="accent1"/>
-          </a:fillRef>
-          <a:effectRef idx="0">
-            <a:schemeClr val="accent1"/>
-          </a:effectRef>
-          <a:fontRef idx="minor">
-            <a:schemeClr val="tx1"/>
-          </a:fontRef>
-        </p:style>
-      </p:cxnSp>
-      <p:cxnSp>
-        <p:nvCxnSpPr>
-          <p:cNvPr id="14" name="Connecteur droit avec flèche 13">
-            <a:extLst>
-              <a:ext uri="{FF2B5EF4-FFF2-40B4-BE49-F238E27FC236}">
-                <a16:creationId xmlns:a16="http://schemas.microsoft.com/office/drawing/2014/main" id="{12969707-0B0F-1C5F-4F79-11BCDD29D5BD}"/>
-              </a:ext>
-            </a:extLst>
-          </p:cNvPr>
-          <p:cNvCxnSpPr/>
-          <p:nvPr/>
-        </p:nvCxnSpPr>
-        <p:spPr>
-          <a:xfrm>
-            <a:off x="6195957" y="2462544"/>
-            <a:ext cx="276059" cy="0"/>
-          </a:xfrm>
-          <a:prstGeom prst="straightConnector1">
-            <a:avLst/>
-          </a:prstGeom>
-          <a:ln w="38100">
-            <a:solidFill>
+            </a:fontRef>
+          </p:style>
+        </p:cxnSp>
+        <p:cxnSp>
+          <p:nvCxnSpPr>
+            <p:cNvPr id="14" name="Connecteur droit avec flèche 13">
+              <a:extLst>
+                <a:ext uri="{FF2B5EF4-FFF2-40B4-BE49-F238E27FC236}">
+                  <a16:creationId xmlns:a16="http://schemas.microsoft.com/office/drawing/2014/main" id="{12969707-0B0F-1C5F-4F79-11BCDD29D5BD}"/>
+                </a:ext>
+              </a:extLst>
+            </p:cNvPr>
+            <p:cNvCxnSpPr/>
+            <p:nvPr/>
+          </p:nvCxnSpPr>
+          <p:spPr>
+            <a:xfrm>
+              <a:off x="6195957" y="2462544"/>
+              <a:ext cx="276059" cy="0"/>
+            </a:xfrm>
+            <a:prstGeom prst="straightConnector1">
+              <a:avLst/>
+            </a:prstGeom>
+            <a:ln w="38100">
+              <a:solidFill>
+                <a:schemeClr val="tx1"/>
+              </a:solidFill>
+              <a:tailEnd type="triangle"/>
+            </a:ln>
+          </p:spPr>
+          <p:style>
+            <a:lnRef idx="1">
+              <a:schemeClr val="accent1"/>
+            </a:lnRef>
+            <a:fillRef idx="0">
+              <a:schemeClr val="accent1"/>
+            </a:fillRef>
+            <a:effectRef idx="0">
+              <a:schemeClr val="accent1"/>
+            </a:effectRef>
+            <a:fontRef idx="minor">
               <a:schemeClr val="tx1"/>
-            </a:solidFill>
-            <a:tailEnd type="triangle"/>
-          </a:ln>
-        </p:spPr>
-        <p:style>
-          <a:lnRef idx="1">
-            <a:schemeClr val="accent1"/>
-          </a:lnRef>
-          <a:fillRef idx="0">
-            <a:schemeClr val="accent1"/>
-          </a:fillRef>
-          <a:effectRef idx="0">
-            <a:schemeClr val="accent1"/>
-          </a:effectRef>
-          <a:fontRef idx="minor">
-            <a:schemeClr val="tx1"/>
-          </a:fontRef>
-        </p:style>
-      </p:cxnSp>
-      <p:cxnSp>
-        <p:nvCxnSpPr>
-          <p:cNvPr id="15" name="Connecteur droit avec flèche 14">
-            <a:extLst>
-              <a:ext uri="{FF2B5EF4-FFF2-40B4-BE49-F238E27FC236}">
-                <a16:creationId xmlns:a16="http://schemas.microsoft.com/office/drawing/2014/main" id="{B14AF69E-F23C-6496-57A1-DDFEAA653B19}"/>
-              </a:ext>
-            </a:extLst>
-          </p:cNvPr>
-          <p:cNvCxnSpPr>
-            <a:cxnSpLocks/>
-            <a:endCxn id="9" idx="0"/>
-          </p:cNvCxnSpPr>
-          <p:nvPr/>
-        </p:nvCxnSpPr>
-        <p:spPr>
-          <a:xfrm>
-            <a:off x="7018863" y="2462544"/>
-            <a:ext cx="257048" cy="1"/>
-          </a:xfrm>
-          <a:prstGeom prst="straightConnector1">
-            <a:avLst/>
-          </a:prstGeom>
-          <a:ln w="38100">
-            <a:solidFill>
+            </a:fontRef>
+          </p:style>
+        </p:cxnSp>
+        <p:cxnSp>
+          <p:nvCxnSpPr>
+            <p:cNvPr id="15" name="Connecteur droit avec flèche 14">
+              <a:extLst>
+                <a:ext uri="{FF2B5EF4-FFF2-40B4-BE49-F238E27FC236}">
+                  <a16:creationId xmlns:a16="http://schemas.microsoft.com/office/drawing/2014/main" id="{B14AF69E-F23C-6496-57A1-DDFEAA653B19}"/>
+                </a:ext>
+              </a:extLst>
+            </p:cNvPr>
+            <p:cNvCxnSpPr>
+              <a:cxnSpLocks/>
+              <a:endCxn id="9" idx="0"/>
+            </p:cNvCxnSpPr>
+            <p:nvPr/>
+          </p:nvCxnSpPr>
+          <p:spPr>
+            <a:xfrm>
+              <a:off x="7018863" y="2462544"/>
+              <a:ext cx="257048" cy="1"/>
+            </a:xfrm>
+            <a:prstGeom prst="straightConnector1">
+              <a:avLst/>
+            </a:prstGeom>
+            <a:ln w="38100">
+              <a:solidFill>
+                <a:schemeClr val="tx1"/>
+              </a:solidFill>
+              <a:tailEnd type="triangle"/>
+            </a:ln>
+          </p:spPr>
+          <p:style>
+            <a:lnRef idx="1">
+              <a:schemeClr val="accent1"/>
+            </a:lnRef>
+            <a:fillRef idx="0">
+              <a:schemeClr val="accent1"/>
+            </a:fillRef>
+            <a:effectRef idx="0">
+              <a:schemeClr val="accent1"/>
+            </a:effectRef>
+            <a:fontRef idx="minor">
               <a:schemeClr val="tx1"/>
-            </a:solidFill>
-            <a:tailEnd type="triangle"/>
-          </a:ln>
-        </p:spPr>
-        <p:style>
-          <a:lnRef idx="1">
-            <a:schemeClr val="accent1"/>
-          </a:lnRef>
-          <a:fillRef idx="0">
-            <a:schemeClr val="accent1"/>
-          </a:fillRef>
-          <a:effectRef idx="0">
-            <a:schemeClr val="accent1"/>
-          </a:effectRef>
-          <a:fontRef idx="minor">
-            <a:schemeClr val="tx1"/>
-          </a:fontRef>
-        </p:style>
-      </p:cxnSp>
-      <p:cxnSp>
-        <p:nvCxnSpPr>
-          <p:cNvPr id="17" name="Connecteur droit avec flèche 16">
-            <a:extLst>
-              <a:ext uri="{FF2B5EF4-FFF2-40B4-BE49-F238E27FC236}">
-                <a16:creationId xmlns:a16="http://schemas.microsoft.com/office/drawing/2014/main" id="{0C748983-78FE-6678-DCDF-31F6956AC036}"/>
-              </a:ext>
-            </a:extLst>
-          </p:cNvPr>
-          <p:cNvCxnSpPr>
-            <a:cxnSpLocks/>
-            <a:stCxn id="9" idx="2"/>
-            <a:endCxn id="11" idx="2"/>
-          </p:cNvCxnSpPr>
-          <p:nvPr/>
-        </p:nvCxnSpPr>
-        <p:spPr>
-          <a:xfrm flipV="1">
-            <a:off x="7795868" y="2462543"/>
-            <a:ext cx="391548" cy="2"/>
-          </a:xfrm>
-          <a:prstGeom prst="straightConnector1">
-            <a:avLst/>
-          </a:prstGeom>
-          <a:ln w="38100">
-            <a:solidFill>
+            </a:fontRef>
+          </p:style>
+        </p:cxnSp>
+        <p:cxnSp>
+          <p:nvCxnSpPr>
+            <p:cNvPr id="17" name="Connecteur droit avec flèche 16">
+              <a:extLst>
+                <a:ext uri="{FF2B5EF4-FFF2-40B4-BE49-F238E27FC236}">
+                  <a16:creationId xmlns:a16="http://schemas.microsoft.com/office/drawing/2014/main" id="{0C748983-78FE-6678-DCDF-31F6956AC036}"/>
+                </a:ext>
+              </a:extLst>
+            </p:cNvPr>
+            <p:cNvCxnSpPr>
+              <a:cxnSpLocks/>
+              <a:stCxn id="9" idx="2"/>
+              <a:endCxn id="11" idx="2"/>
+            </p:cNvCxnSpPr>
+            <p:nvPr/>
+          </p:nvCxnSpPr>
+          <p:spPr>
+            <a:xfrm flipV="1">
+              <a:off x="7795868" y="2462543"/>
+              <a:ext cx="391548" cy="2"/>
+            </a:xfrm>
+            <a:prstGeom prst="straightConnector1">
+              <a:avLst/>
+            </a:prstGeom>
+            <a:ln w="38100">
+              <a:solidFill>
+                <a:schemeClr val="tx1"/>
+              </a:solidFill>
+              <a:tailEnd type="triangle"/>
+            </a:ln>
+          </p:spPr>
+          <p:style>
+            <a:lnRef idx="1">
+              <a:schemeClr val="accent1"/>
+            </a:lnRef>
+            <a:fillRef idx="0">
+              <a:schemeClr val="accent1"/>
+            </a:fillRef>
+            <a:effectRef idx="0">
+              <a:schemeClr val="accent1"/>
+            </a:effectRef>
+            <a:fontRef idx="minor">
               <a:schemeClr val="tx1"/>
-            </a:solidFill>
-            <a:tailEnd type="triangle"/>
-          </a:ln>
-        </p:spPr>
-        <p:style>
-          <a:lnRef idx="1">
-            <a:schemeClr val="accent1"/>
-          </a:lnRef>
-          <a:fillRef idx="0">
-            <a:schemeClr val="accent1"/>
-          </a:fillRef>
-          <a:effectRef idx="0">
-            <a:schemeClr val="accent1"/>
-          </a:effectRef>
-          <a:fontRef idx="minor">
-            <a:schemeClr val="tx1"/>
-          </a:fontRef>
-        </p:style>
-      </p:cxnSp>
-      <p:cxnSp>
-        <p:nvCxnSpPr>
-          <p:cNvPr id="22" name="Connecteur droit avec flèche 21">
-            <a:extLst>
-              <a:ext uri="{FF2B5EF4-FFF2-40B4-BE49-F238E27FC236}">
-                <a16:creationId xmlns:a16="http://schemas.microsoft.com/office/drawing/2014/main" id="{A4792706-E571-98C2-B973-69FBDA35A6CF}"/>
-              </a:ext>
-            </a:extLst>
-          </p:cNvPr>
-          <p:cNvCxnSpPr>
-            <a:cxnSpLocks/>
-          </p:cNvCxnSpPr>
-          <p:nvPr/>
-        </p:nvCxnSpPr>
-        <p:spPr>
-          <a:xfrm>
-            <a:off x="3009661" y="2462543"/>
-            <a:ext cx="776623" cy="2022"/>
-          </a:xfrm>
-          <a:prstGeom prst="straightConnector1">
-            <a:avLst/>
-          </a:prstGeom>
-          <a:ln w="38100">
-            <a:solidFill>
+            </a:fontRef>
+          </p:style>
+        </p:cxnSp>
+        <p:cxnSp>
+          <p:nvCxnSpPr>
+            <p:cNvPr id="22" name="Connecteur droit avec flèche 21">
+              <a:extLst>
+                <a:ext uri="{FF2B5EF4-FFF2-40B4-BE49-F238E27FC236}">
+                  <a16:creationId xmlns:a16="http://schemas.microsoft.com/office/drawing/2014/main" id="{A4792706-E571-98C2-B973-69FBDA35A6CF}"/>
+                </a:ext>
+              </a:extLst>
+            </p:cNvPr>
+            <p:cNvCxnSpPr>
+              <a:cxnSpLocks/>
+            </p:cNvCxnSpPr>
+            <p:nvPr/>
+          </p:nvCxnSpPr>
+          <p:spPr>
+            <a:xfrm>
+              <a:off x="3009661" y="2462543"/>
+              <a:ext cx="776623" cy="2022"/>
+            </a:xfrm>
+            <a:prstGeom prst="straightConnector1">
+              <a:avLst/>
+            </a:prstGeom>
+            <a:ln w="38100">
+              <a:solidFill>
+                <a:schemeClr val="tx1"/>
+              </a:solidFill>
+              <a:tailEnd type="triangle"/>
+            </a:ln>
+          </p:spPr>
+          <p:style>
+            <a:lnRef idx="1">
+              <a:schemeClr val="accent1"/>
+            </a:lnRef>
+            <a:fillRef idx="0">
+              <a:schemeClr val="accent1"/>
+            </a:fillRef>
+            <a:effectRef idx="0">
+              <a:schemeClr val="accent1"/>
+            </a:effectRef>
+            <a:fontRef idx="minor">
               <a:schemeClr val="tx1"/>
-            </a:solidFill>
-            <a:tailEnd type="triangle"/>
-          </a:ln>
-        </p:spPr>
-        <p:style>
-          <a:lnRef idx="1">
-            <a:schemeClr val="accent1"/>
-          </a:lnRef>
-          <a:fillRef idx="0">
-            <a:schemeClr val="accent1"/>
-          </a:fillRef>
-          <a:effectRef idx="0">
-            <a:schemeClr val="accent1"/>
-          </a:effectRef>
-          <a:fontRef idx="minor">
-            <a:schemeClr val="tx1"/>
-          </a:fontRef>
-        </p:style>
-      </p:cxnSp>
-      <p:cxnSp>
-        <p:nvCxnSpPr>
-          <p:cNvPr id="23" name="Connecteur droit avec flèche 22">
-            <a:extLst>
-              <a:ext uri="{FF2B5EF4-FFF2-40B4-BE49-F238E27FC236}">
-                <a16:creationId xmlns:a16="http://schemas.microsoft.com/office/drawing/2014/main" id="{27B3DF29-3522-F32C-495B-55F3B1AA354C}"/>
-              </a:ext>
-            </a:extLst>
-          </p:cNvPr>
-          <p:cNvCxnSpPr>
-            <a:cxnSpLocks/>
-            <a:stCxn id="11" idx="6"/>
-          </p:cNvCxnSpPr>
-          <p:nvPr/>
-        </p:nvCxnSpPr>
-        <p:spPr>
-          <a:xfrm>
-            <a:off x="8707374" y="2462543"/>
-            <a:ext cx="943007" cy="0"/>
-          </a:xfrm>
-          <a:prstGeom prst="straightConnector1">
-            <a:avLst/>
-          </a:prstGeom>
-          <a:ln w="38100">
-            <a:solidFill>
+            </a:fontRef>
+          </p:style>
+        </p:cxnSp>
+        <p:cxnSp>
+          <p:nvCxnSpPr>
+            <p:cNvPr id="23" name="Connecteur droit avec flèche 22">
+              <a:extLst>
+                <a:ext uri="{FF2B5EF4-FFF2-40B4-BE49-F238E27FC236}">
+                  <a16:creationId xmlns:a16="http://schemas.microsoft.com/office/drawing/2014/main" id="{27B3DF29-3522-F32C-495B-55F3B1AA354C}"/>
+                </a:ext>
+              </a:extLst>
+            </p:cNvPr>
+            <p:cNvCxnSpPr>
+              <a:cxnSpLocks/>
+              <a:stCxn id="11" idx="6"/>
+            </p:cNvCxnSpPr>
+            <p:nvPr/>
+          </p:nvCxnSpPr>
+          <p:spPr>
+            <a:xfrm>
+              <a:off x="8707374" y="2462543"/>
+              <a:ext cx="943007" cy="0"/>
+            </a:xfrm>
+            <a:prstGeom prst="straightConnector1">
+              <a:avLst/>
+            </a:prstGeom>
+            <a:ln w="38100">
+              <a:solidFill>
+                <a:schemeClr val="tx1"/>
+              </a:solidFill>
+              <a:tailEnd type="triangle"/>
+            </a:ln>
+          </p:spPr>
+          <p:style>
+            <a:lnRef idx="1">
+              <a:schemeClr val="accent1"/>
+            </a:lnRef>
+            <a:fillRef idx="0">
+              <a:schemeClr val="accent1"/>
+            </a:fillRef>
+            <a:effectRef idx="0">
+              <a:schemeClr val="accent1"/>
+            </a:effectRef>
+            <a:fontRef idx="minor">
               <a:schemeClr val="tx1"/>
-            </a:solidFill>
-            <a:tailEnd type="triangle"/>
-          </a:ln>
-        </p:spPr>
-        <p:style>
-          <a:lnRef idx="1">
-            <a:schemeClr val="accent1"/>
-          </a:lnRef>
-          <a:fillRef idx="0">
-            <a:schemeClr val="accent1"/>
-          </a:fillRef>
-          <a:effectRef idx="0">
-            <a:schemeClr val="accent1"/>
-          </a:effectRef>
-          <a:fontRef idx="minor">
-            <a:schemeClr val="tx1"/>
-          </a:fontRef>
-        </p:style>
-      </p:cxnSp>
-      <p:sp>
-        <p:nvSpPr>
-          <p:cNvPr id="27" name="Rectangle 26">
-            <a:extLst>
-              <a:ext uri="{FF2B5EF4-FFF2-40B4-BE49-F238E27FC236}">
-                <a16:creationId xmlns:a16="http://schemas.microsoft.com/office/drawing/2014/main" id="{A7658422-3B06-5EB7-0FFC-E2A3A2B0C18E}"/>
-              </a:ext>
-            </a:extLst>
-          </p:cNvPr>
-          <p:cNvSpPr/>
-          <p:nvPr/>
-        </p:nvSpPr>
-        <p:spPr>
-          <a:xfrm>
-            <a:off x="3476588" y="1173232"/>
-            <a:ext cx="4533247" cy="2756589"/>
-          </a:xfrm>
-          <a:prstGeom prst="rect">
-            <a:avLst/>
-          </a:prstGeom>
-          <a:noFill/>
-        </p:spPr>
-        <p:style>
-          <a:lnRef idx="2">
-            <a:schemeClr val="accent1">
-              <a:shade val="15000"/>
-            </a:schemeClr>
-          </a:lnRef>
-          <a:fillRef idx="1">
-            <a:schemeClr val="accent1"/>
-          </a:fillRef>
-          <a:effectRef idx="0">
-            <a:schemeClr val="accent1"/>
-          </a:effectRef>
-          <a:fontRef idx="minor">
-            <a:schemeClr val="lt1"/>
-          </a:fontRef>
-        </p:style>
-        <p:txBody>
-          <a:bodyPr rtlCol="0" anchor="ctr"/>
-          <a:lstStyle/>
-          <a:p>
-            <a:pPr algn="ctr"/>
-            <a:endParaRPr lang="fr-FR" dirty="0"/>
-          </a:p>
-        </p:txBody>
-      </p:sp>
-      <p:sp>
-        <p:nvSpPr>
-          <p:cNvPr id="50" name="ZoneTexte 49">
-            <a:extLst>
-              <a:ext uri="{FF2B5EF4-FFF2-40B4-BE49-F238E27FC236}">
-                <a16:creationId xmlns:a16="http://schemas.microsoft.com/office/drawing/2014/main" id="{20B050AA-DFB1-48F7-0DB3-C27BA9C0B151}"/>
-              </a:ext>
-            </a:extLst>
-          </p:cNvPr>
-          <p:cNvSpPr txBox="1"/>
-          <p:nvPr/>
-        </p:nvSpPr>
-        <p:spPr>
-          <a:xfrm>
-            <a:off x="7803408" y="2759201"/>
-            <a:ext cx="1327016" cy="369332"/>
-          </a:xfrm>
-          <a:prstGeom prst="rect">
-            <a:avLst/>
-          </a:prstGeom>
-          <a:noFill/>
-        </p:spPr>
-        <p:txBody>
-          <a:bodyPr wrap="square">
-            <a:spAutoFit/>
-          </a:bodyPr>
-          <a:lstStyle/>
-          <a:p>
-            <a:pPr algn="ctr"/>
-            <a:r>
-              <a:rPr lang="fr-FR" sz="1800" b="1" dirty="0">
-                <a:solidFill>
-                  <a:schemeClr val="tx1"/>
-                </a:solidFill>
-              </a:rPr>
-              <a:t>régression</a:t>
-            </a:r>
-          </a:p>
-        </p:txBody>
-      </p:sp>
-      <p:cxnSp>
-        <p:nvCxnSpPr>
-          <p:cNvPr id="4" name="Connecteur droit avec flèche 3">
-            <a:extLst>
-              <a:ext uri="{FF2B5EF4-FFF2-40B4-BE49-F238E27FC236}">
-                <a16:creationId xmlns:a16="http://schemas.microsoft.com/office/drawing/2014/main" id="{F039B440-BA93-315C-8DE4-E28301A3B14A}"/>
-              </a:ext>
-            </a:extLst>
-          </p:cNvPr>
-          <p:cNvCxnSpPr/>
-          <p:nvPr/>
-        </p:nvCxnSpPr>
-        <p:spPr>
-          <a:xfrm>
-            <a:off x="5102258" y="2450828"/>
-            <a:ext cx="276059" cy="0"/>
-          </a:xfrm>
-          <a:prstGeom prst="straightConnector1">
-            <a:avLst/>
-          </a:prstGeom>
-          <a:ln w="38100">
-            <a:solidFill>
+            </a:fontRef>
+          </p:style>
+        </p:cxnSp>
+        <p:sp>
+          <p:nvSpPr>
+            <p:cNvPr id="27" name="Rectangle 26">
+              <a:extLst>
+                <a:ext uri="{FF2B5EF4-FFF2-40B4-BE49-F238E27FC236}">
+                  <a16:creationId xmlns:a16="http://schemas.microsoft.com/office/drawing/2014/main" id="{A7658422-3B06-5EB7-0FFC-E2A3A2B0C18E}"/>
+                </a:ext>
+              </a:extLst>
+            </p:cNvPr>
+            <p:cNvSpPr/>
+            <p:nvPr/>
+          </p:nvSpPr>
+          <p:spPr>
+            <a:xfrm>
+              <a:off x="3249038" y="1173232"/>
+              <a:ext cx="6040877" cy="2499779"/>
+            </a:xfrm>
+            <a:prstGeom prst="rect">
+              <a:avLst/>
+            </a:prstGeom>
+            <a:noFill/>
+          </p:spPr>
+          <p:style>
+            <a:lnRef idx="2">
+              <a:schemeClr val="accent1">
+                <a:shade val="15000"/>
+              </a:schemeClr>
+            </a:lnRef>
+            <a:fillRef idx="1">
+              <a:schemeClr val="accent1"/>
+            </a:fillRef>
+            <a:effectRef idx="0">
+              <a:schemeClr val="accent1"/>
+            </a:effectRef>
+            <a:fontRef idx="minor">
+              <a:schemeClr val="lt1"/>
+            </a:fontRef>
+          </p:style>
+          <p:txBody>
+            <a:bodyPr rtlCol="0" anchor="ctr"/>
+            <a:lstStyle/>
+            <a:p>
+              <a:pPr algn="ctr"/>
+              <a:endParaRPr lang="fr-FR" dirty="0"/>
+            </a:p>
+          </p:txBody>
+        </p:sp>
+        <p:sp>
+          <p:nvSpPr>
+            <p:cNvPr id="50" name="ZoneTexte 49">
+              <a:extLst>
+                <a:ext uri="{FF2B5EF4-FFF2-40B4-BE49-F238E27FC236}">
+                  <a16:creationId xmlns:a16="http://schemas.microsoft.com/office/drawing/2014/main" id="{20B050AA-DFB1-48F7-0DB3-C27BA9C0B151}"/>
+                </a:ext>
+              </a:extLst>
+            </p:cNvPr>
+            <p:cNvSpPr txBox="1"/>
+            <p:nvPr/>
+          </p:nvSpPr>
+          <p:spPr>
+            <a:xfrm>
+              <a:off x="7803408" y="2759201"/>
+              <a:ext cx="1327016" cy="369332"/>
+            </a:xfrm>
+            <a:prstGeom prst="rect">
+              <a:avLst/>
+            </a:prstGeom>
+            <a:noFill/>
+          </p:spPr>
+          <p:txBody>
+            <a:bodyPr wrap="square">
+              <a:spAutoFit/>
+            </a:bodyPr>
+            <a:lstStyle/>
+            <a:p>
+              <a:pPr algn="ctr"/>
+              <a:r>
+                <a:rPr lang="fr-FR" sz="1800" b="1" dirty="0">
+                  <a:solidFill>
+                    <a:schemeClr val="tx1"/>
+                  </a:solidFill>
+                </a:rPr>
+                <a:t>régression</a:t>
+              </a:r>
+            </a:p>
+          </p:txBody>
+        </p:sp>
+        <p:cxnSp>
+          <p:nvCxnSpPr>
+            <p:cNvPr id="4" name="Connecteur droit avec flèche 3">
+              <a:extLst>
+                <a:ext uri="{FF2B5EF4-FFF2-40B4-BE49-F238E27FC236}">
+                  <a16:creationId xmlns:a16="http://schemas.microsoft.com/office/drawing/2014/main" id="{F039B440-BA93-315C-8DE4-E28301A3B14A}"/>
+                </a:ext>
+              </a:extLst>
+            </p:cNvPr>
+            <p:cNvCxnSpPr/>
+            <p:nvPr/>
+          </p:nvCxnSpPr>
+          <p:spPr>
+            <a:xfrm>
+              <a:off x="5102258" y="2450828"/>
+              <a:ext cx="276059" cy="0"/>
+            </a:xfrm>
+            <a:prstGeom prst="straightConnector1">
+              <a:avLst/>
+            </a:prstGeom>
+            <a:ln w="38100">
+              <a:solidFill>
+                <a:schemeClr val="tx1"/>
+              </a:solidFill>
+              <a:tailEnd type="triangle"/>
+            </a:ln>
+          </p:spPr>
+          <p:style>
+            <a:lnRef idx="1">
+              <a:schemeClr val="accent1"/>
+            </a:lnRef>
+            <a:fillRef idx="0">
+              <a:schemeClr val="accent1"/>
+            </a:fillRef>
+            <a:effectRef idx="0">
+              <a:schemeClr val="accent1"/>
+            </a:effectRef>
+            <a:fontRef idx="minor">
               <a:schemeClr val="tx1"/>
-            </a:solidFill>
-            <a:tailEnd type="triangle"/>
-          </a:ln>
-        </p:spPr>
-        <p:style>
-          <a:lnRef idx="1">
-            <a:schemeClr val="accent1"/>
-          </a:lnRef>
-          <a:fillRef idx="0">
-            <a:schemeClr val="accent1"/>
-          </a:fillRef>
-          <a:effectRef idx="0">
-            <a:schemeClr val="accent1"/>
-          </a:effectRef>
-          <a:fontRef idx="minor">
-            <a:schemeClr val="tx1"/>
-          </a:fontRef>
-        </p:style>
-      </p:cxnSp>
-      <p:cxnSp>
-        <p:nvCxnSpPr>
-          <p:cNvPr id="6" name="Connecteur droit 5">
-            <a:extLst>
-              <a:ext uri="{FF2B5EF4-FFF2-40B4-BE49-F238E27FC236}">
-                <a16:creationId xmlns:a16="http://schemas.microsoft.com/office/drawing/2014/main" id="{02919DD9-7C3F-9C72-06F0-5354984472E1}"/>
-              </a:ext>
-            </a:extLst>
-          </p:cNvPr>
-          <p:cNvCxnSpPr/>
-          <p:nvPr/>
-        </p:nvCxnSpPr>
-        <p:spPr>
-          <a:xfrm>
-            <a:off x="5378317" y="2450828"/>
-            <a:ext cx="817640" cy="11715"/>
-          </a:xfrm>
-          <a:prstGeom prst="line">
-            <a:avLst/>
-          </a:prstGeom>
-          <a:ln>
-            <a:prstDash val="sysDot"/>
-          </a:ln>
-        </p:spPr>
-        <p:style>
-          <a:lnRef idx="3">
-            <a:schemeClr val="dk1"/>
-          </a:lnRef>
-          <a:fillRef idx="0">
-            <a:schemeClr val="dk1"/>
-          </a:fillRef>
-          <a:effectRef idx="2">
-            <a:schemeClr val="dk1"/>
-          </a:effectRef>
-          <a:fontRef idx="minor">
-            <a:schemeClr val="tx1"/>
-          </a:fontRef>
-        </p:style>
-      </p:cxnSp>
+            </a:fontRef>
+          </p:style>
+        </p:cxnSp>
+        <p:cxnSp>
+          <p:nvCxnSpPr>
+            <p:cNvPr id="6" name="Connecteur droit 5">
+              <a:extLst>
+                <a:ext uri="{FF2B5EF4-FFF2-40B4-BE49-F238E27FC236}">
+                  <a16:creationId xmlns:a16="http://schemas.microsoft.com/office/drawing/2014/main" id="{02919DD9-7C3F-9C72-06F0-5354984472E1}"/>
+                </a:ext>
+              </a:extLst>
+            </p:cNvPr>
+            <p:cNvCxnSpPr/>
+            <p:nvPr/>
+          </p:nvCxnSpPr>
+          <p:spPr>
+            <a:xfrm>
+              <a:off x="5378317" y="2450828"/>
+              <a:ext cx="817640" cy="11715"/>
+            </a:xfrm>
+            <a:prstGeom prst="line">
+              <a:avLst/>
+            </a:prstGeom>
+            <a:ln>
+              <a:prstDash val="sysDot"/>
+            </a:ln>
+          </p:spPr>
+          <p:style>
+            <a:lnRef idx="3">
+              <a:schemeClr val="dk1"/>
+            </a:lnRef>
+            <a:fillRef idx="0">
+              <a:schemeClr val="dk1"/>
+            </a:fillRef>
+            <a:effectRef idx="2">
+              <a:schemeClr val="dk1"/>
+            </a:effectRef>
+            <a:fontRef idx="minor">
+              <a:schemeClr val="tx1"/>
+            </a:fontRef>
+          </p:style>
+        </p:cxnSp>
+      </p:grpSp>
     </p:spTree>
     <p:extLst>
       <p:ext uri="{BB962C8B-B14F-4D97-AF65-F5344CB8AC3E}">
